--- a/exports/pptx/lessons/middle-module-08-yoga/day-08-project-session-1.pptx
+++ b/exports/pptx/lessons/middle-module-08-yoga/day-08-project-session-1.pptx
@@ -16,9 +16,12 @@
     <p:sldId id="264" r:id="rId10"/>
     <p:sldId id="265" r:id="rId11"/>
     <p:sldId id="266" r:id="rId12"/>
+    <p:sldId id="267" r:id="rId13"/>
+    <p:sldId id="268" r:id="rId14"/>
+    <p:sldId id="269" r:id="rId15"/>
   </p:sldIdLst>
   <p:notesMasterIdLst>
-    <p:notesMasterId r:id="rId13"/>
+    <p:notesMasterId r:id="rId16"/>
   </p:notesMasterIdLst>
   <p:sldSz cx="9144000" cy="5143500"/>
   <p:notesSz cx="5143500" cy="9144000"/>
@@ -712,6 +715,270 @@
             <a:fld id="{F7021451-1387-4CA6-816F-3879F97B5CBC}" type="slidenum">
               <a:rPr lang="en-US"/>
               <a:t>11</a:t>
+            </a:fld>
+            <a:endParaRPr lang="en-US"/>
+          </a:p>
+        </p:txBody>
+      </p:sp>
+    </p:spTree>
+    <p:extLst>
+      <p:ext uri="{BB962C8B-B14F-4D97-AF65-F5344CB8AC3E}">
+        <p14:creationId xmlns:p14="http://schemas.microsoft.com/office/powerpoint/2010/main" val="1024086991"/>
+      </p:ext>
+    </p:extLst>
+  </p:cSld>
+  <p:clrMapOvr>
+    <a:masterClrMapping/>
+  </p:clrMapOvr>
+</p:notes>
+</file>
+
+<file path=ppt/notesSlides/notesSlide12.xml><?xml version="1.0" encoding="utf-8"?>
+<p:notes xmlns:a="http://schemas.openxmlformats.org/drawingml/2006/main" xmlns:r="http://schemas.openxmlformats.org/officeDocument/2006/relationships" xmlns:p="http://schemas.openxmlformats.org/presentationml/2006/main">
+  <p:cSld>
+    <p:spTree>
+      <p:nvGrpSpPr>
+        <p:cNvPr id="1" name=""/>
+        <p:cNvGrpSpPr/>
+        <p:nvPr/>
+      </p:nvGrpSpPr>
+      <p:grpSpPr>
+        <a:xfrm>
+          <a:off x="0" y="0"/>
+          <a:ext cx="0" cy="0"/>
+          <a:chOff x="0" y="0"/>
+          <a:chExt cx="0" cy="0"/>
+        </a:xfrm>
+      </p:grpSpPr>
+      <p:sp>
+        <p:nvSpPr>
+          <p:cNvPr id="2" name="Slide Image Placeholder 1"/>
+          <p:cNvSpPr>
+            <a:spLocks noGrp="1" noRot="1" noChangeAspect="1"/>
+          </p:cNvSpPr>
+          <p:nvPr>
+            <p:ph type="sldImg"/>
+          </p:nvPr>
+        </p:nvSpPr>
+        <p:spPr/>
+      </p:sp>
+      <p:sp>
+        <p:nvSpPr>
+          <p:cNvPr id="3" name="Notes Placeholder 2"/>
+          <p:cNvSpPr>
+            <a:spLocks noGrp="1"/>
+          </p:cNvSpPr>
+          <p:nvPr>
+            <p:ph type="body" idx="1"/>
+          </p:nvPr>
+        </p:nvSpPr>
+        <p:spPr/>
+        <p:txBody>
+          <a:bodyPr/>
+          <a:lstStyle/>
+          <a:p>
+            <a:r>
+              <a:rPr lang="en-US" dirty="0"/>
+              <a:t/>
+            </a:r>
+            <a:endParaRPr lang="en-US" dirty="0"/>
+          </a:p>
+        </p:txBody>
+      </p:sp>
+      <p:sp>
+        <p:nvSpPr>
+          <p:cNvPr id="4" name="Slide Number Placeholder 3"/>
+          <p:cNvSpPr>
+            <a:spLocks noGrp="1"/>
+          </p:cNvSpPr>
+          <p:nvPr>
+            <p:ph type="sldNum" sz="quarter" idx="10"/>
+          </p:nvPr>
+        </p:nvSpPr>
+        <p:spPr/>
+        <p:txBody>
+          <a:bodyPr/>
+          <a:lstStyle/>
+          <a:p>
+            <a:fld id="{F7021451-1387-4CA6-816F-3879F97B5CBC}" type="slidenum">
+              <a:rPr lang="en-US"/>
+              <a:t>12</a:t>
+            </a:fld>
+            <a:endParaRPr lang="en-US"/>
+          </a:p>
+        </p:txBody>
+      </p:sp>
+    </p:spTree>
+    <p:extLst>
+      <p:ext uri="{BB962C8B-B14F-4D97-AF65-F5344CB8AC3E}">
+        <p14:creationId xmlns:p14="http://schemas.microsoft.com/office/powerpoint/2010/main" val="1024086991"/>
+      </p:ext>
+    </p:extLst>
+  </p:cSld>
+  <p:clrMapOvr>
+    <a:masterClrMapping/>
+  </p:clrMapOvr>
+</p:notes>
+</file>
+
+<file path=ppt/notesSlides/notesSlide13.xml><?xml version="1.0" encoding="utf-8"?>
+<p:notes xmlns:a="http://schemas.openxmlformats.org/drawingml/2006/main" xmlns:r="http://schemas.openxmlformats.org/officeDocument/2006/relationships" xmlns:p="http://schemas.openxmlformats.org/presentationml/2006/main">
+  <p:cSld>
+    <p:spTree>
+      <p:nvGrpSpPr>
+        <p:cNvPr id="1" name=""/>
+        <p:cNvGrpSpPr/>
+        <p:nvPr/>
+      </p:nvGrpSpPr>
+      <p:grpSpPr>
+        <a:xfrm>
+          <a:off x="0" y="0"/>
+          <a:ext cx="0" cy="0"/>
+          <a:chOff x="0" y="0"/>
+          <a:chExt cx="0" cy="0"/>
+        </a:xfrm>
+      </p:grpSpPr>
+      <p:sp>
+        <p:nvSpPr>
+          <p:cNvPr id="2" name="Slide Image Placeholder 1"/>
+          <p:cNvSpPr>
+            <a:spLocks noGrp="1" noRot="1" noChangeAspect="1"/>
+          </p:cNvSpPr>
+          <p:nvPr>
+            <p:ph type="sldImg"/>
+          </p:nvPr>
+        </p:nvSpPr>
+        <p:spPr/>
+      </p:sp>
+      <p:sp>
+        <p:nvSpPr>
+          <p:cNvPr id="3" name="Notes Placeholder 2"/>
+          <p:cNvSpPr>
+            <a:spLocks noGrp="1"/>
+          </p:cNvSpPr>
+          <p:nvPr>
+            <p:ph type="body" idx="1"/>
+          </p:nvPr>
+        </p:nvSpPr>
+        <p:spPr/>
+        <p:txBody>
+          <a:bodyPr/>
+          <a:lstStyle/>
+          <a:p>
+            <a:r>
+              <a:rPr lang="en-US" dirty="0"/>
+              <a:t/>
+            </a:r>
+            <a:endParaRPr lang="en-US" dirty="0"/>
+          </a:p>
+        </p:txBody>
+      </p:sp>
+      <p:sp>
+        <p:nvSpPr>
+          <p:cNvPr id="4" name="Slide Number Placeholder 3"/>
+          <p:cNvSpPr>
+            <a:spLocks noGrp="1"/>
+          </p:cNvSpPr>
+          <p:nvPr>
+            <p:ph type="sldNum" sz="quarter" idx="10"/>
+          </p:nvPr>
+        </p:nvSpPr>
+        <p:spPr/>
+        <p:txBody>
+          <a:bodyPr/>
+          <a:lstStyle/>
+          <a:p>
+            <a:fld id="{F7021451-1387-4CA6-816F-3879F97B5CBC}" type="slidenum">
+              <a:rPr lang="en-US"/>
+              <a:t>13</a:t>
+            </a:fld>
+            <a:endParaRPr lang="en-US"/>
+          </a:p>
+        </p:txBody>
+      </p:sp>
+    </p:spTree>
+    <p:extLst>
+      <p:ext uri="{BB962C8B-B14F-4D97-AF65-F5344CB8AC3E}">
+        <p14:creationId xmlns:p14="http://schemas.microsoft.com/office/powerpoint/2010/main" val="1024086991"/>
+      </p:ext>
+    </p:extLst>
+  </p:cSld>
+  <p:clrMapOvr>
+    <a:masterClrMapping/>
+  </p:clrMapOvr>
+</p:notes>
+</file>
+
+<file path=ppt/notesSlides/notesSlide14.xml><?xml version="1.0" encoding="utf-8"?>
+<p:notes xmlns:a="http://schemas.openxmlformats.org/drawingml/2006/main" xmlns:r="http://schemas.openxmlformats.org/officeDocument/2006/relationships" xmlns:p="http://schemas.openxmlformats.org/presentationml/2006/main">
+  <p:cSld>
+    <p:spTree>
+      <p:nvGrpSpPr>
+        <p:cNvPr id="1" name=""/>
+        <p:cNvGrpSpPr/>
+        <p:nvPr/>
+      </p:nvGrpSpPr>
+      <p:grpSpPr>
+        <a:xfrm>
+          <a:off x="0" y="0"/>
+          <a:ext cx="0" cy="0"/>
+          <a:chOff x="0" y="0"/>
+          <a:chExt cx="0" cy="0"/>
+        </a:xfrm>
+      </p:grpSpPr>
+      <p:sp>
+        <p:nvSpPr>
+          <p:cNvPr id="2" name="Slide Image Placeholder 1"/>
+          <p:cNvSpPr>
+            <a:spLocks noGrp="1" noRot="1" noChangeAspect="1"/>
+          </p:cNvSpPr>
+          <p:nvPr>
+            <p:ph type="sldImg"/>
+          </p:nvPr>
+        </p:nvSpPr>
+        <p:spPr/>
+      </p:sp>
+      <p:sp>
+        <p:nvSpPr>
+          <p:cNvPr id="3" name="Notes Placeholder 2"/>
+          <p:cNvSpPr>
+            <a:spLocks noGrp="1"/>
+          </p:cNvSpPr>
+          <p:nvPr>
+            <p:ph type="body" idx="1"/>
+          </p:nvPr>
+        </p:nvSpPr>
+        <p:spPr/>
+        <p:txBody>
+          <a:bodyPr/>
+          <a:lstStyle/>
+          <a:p>
+            <a:r>
+              <a:rPr lang="en-US" dirty="0"/>
+              <a:t/>
+            </a:r>
+            <a:endParaRPr lang="en-US" dirty="0"/>
+          </a:p>
+        </p:txBody>
+      </p:sp>
+      <p:sp>
+        <p:nvSpPr>
+          <p:cNvPr id="4" name="Slide Number Placeholder 3"/>
+          <p:cNvSpPr>
+            <a:spLocks noGrp="1"/>
+          </p:cNvSpPr>
+          <p:nvPr>
+            <p:ph type="sldNum" sz="quarter" idx="10"/>
+          </p:nvPr>
+        </p:nvSpPr>
+        <p:spPr/>
+        <p:txBody>
+          <a:bodyPr/>
+          <a:lstStyle/>
+          <a:p>
+            <a:fld id="{F7021451-1387-4CA6-816F-3879F97B5CBC}" type="slidenum">
+              <a:rPr lang="en-US"/>
+              <a:t>14</a:t>
             </a:fld>
             <a:endParaRPr lang="en-US"/>
           </a:p>
@@ -2011,102 +2278,6 @@
         </p:nvSpPr>
         <p:spPr>
           <a:xfrm>
-            <a:off x="406301" y="1223963"/>
-            <a:ext cx="8498026" cy="274290"/>
-          </a:xfrm>
-          <a:prstGeom prst="rect">
-            <a:avLst/>
-          </a:prstGeom>
-          <a:noFill/>
-          <a:ln/>
-        </p:spPr>
-        <p:txBody>
-          <a:bodyPr wrap="square" lIns="0" tIns="0" rIns="0" bIns="0" rtlCol="0" anchor="t"/>
-          <a:lstStyle/>
-          <a:p>
-            <a:pPr algn="l" indent="0" marL="0">
-              <a:lnSpc>
-                <a:spcPts val="2160"/>
-              </a:lnSpc>
-              <a:spcBef>
-                <a:spcPts val="600"/>
-              </a:spcBef>
-              <a:spcAft>
-                <a:spcPts val="800"/>
-              </a:spcAft>
-              <a:buNone/>
-            </a:pPr>
-            <a:r>
-              <a:rPr lang="en-US" sz="1800" b="1" dirty="0">
-                <a:solidFill>
-                  <a:srgbClr val="FE4447"/>
-                </a:solidFill>
-                <a:latin typeface="Georgia" pitchFamily="34" charset="0"/>
-                <a:ea typeface="Georgia" pitchFamily="34" charset="-122"/>
-                <a:cs typeface="Georgia" pitchFamily="34" charset="-120"/>
-              </a:rPr>
-              <a:t>Learning objective</a:t>
-            </a:r>
-            <a:endParaRPr lang="en-US" sz="1800" dirty="0"/>
-          </a:p>
-        </p:txBody>
-      </p:sp>
-      <p:sp>
-        <p:nvSpPr>
-          <p:cNvPr id="6" name="Text 4"/>
-          <p:cNvSpPr/>
-          <p:nvPr/>
-        </p:nvSpPr>
-        <p:spPr>
-          <a:xfrm>
-            <a:off x="406301" y="1637854"/>
-            <a:ext cx="8498026" cy="426541"/>
-          </a:xfrm>
-          <a:prstGeom prst="rect">
-            <a:avLst/>
-          </a:prstGeom>
-          <a:noFill/>
-          <a:ln/>
-        </p:spPr>
-        <p:txBody>
-          <a:bodyPr wrap="square" lIns="0" tIns="0" rIns="0" bIns="0" rtlCol="0" anchor="t"/>
-          <a:lstStyle/>
-          <a:p>
-            <a:pPr algn="l" indent="0" marL="0">
-              <a:lnSpc>
-                <a:spcPts val="1680"/>
-              </a:lnSpc>
-              <a:spcBef>
-                <a:spcPts val="300"/>
-              </a:spcBef>
-              <a:spcAft>
-                <a:spcPts val="300"/>
-              </a:spcAft>
-              <a:buNone/>
-            </a:pPr>
-            <a:r>
-              <a:rPr lang="en-US" sz="1200" dirty="0">
-                <a:solidFill>
-                  <a:srgbClr val="1C2833"/>
-                </a:solidFill>
-                <a:latin typeface="Arial" pitchFamily="34" charset="0"/>
-                <a:ea typeface="Arial" pitchFamily="34" charset="-122"/>
-                <a:cs typeface="Arial" pitchFamily="34" charset="-120"/>
-              </a:rPr>
-              <a:t>By the end of this lesson, every pair will have a written outline of a 5-minute yoga routine for their chosen audience, including specific āsanas, a breath element, and one source citation.</a:t>
-            </a:r>
-            <a:endParaRPr lang="en-US" sz="1200" dirty="0"/>
-          </a:p>
-        </p:txBody>
-      </p:sp>
-      <p:sp>
-        <p:nvSpPr>
-          <p:cNvPr id="7" name="Text 5"/>
-          <p:cNvSpPr/>
-          <p:nvPr/>
-        </p:nvSpPr>
-        <p:spPr>
-          <a:xfrm>
             <a:off x="406301" y="4434929"/>
             <a:ext cx="8498026" cy="213271"/>
           </a:xfrm>
@@ -2251,7 +2422,7 @@
                 <a:ea typeface="Georgia" pitchFamily="34" charset="-122"/>
                 <a:cs typeface="Georgia" pitchFamily="34" charset="-120"/>
               </a:rPr>
-              <a:t>Teacher notes</a:t>
+              <a:t>Student-facing content</a:t>
             </a:r>
             <a:endParaRPr lang="en-US" sz="1800" dirty="0"/>
           </a:p>
@@ -2265,13 +2436,66 @@
         </p:nvSpPr>
         <p:spPr>
           <a:xfrm>
-            <a:off x="406301" y="870942"/>
-            <a:ext cx="8498026" cy="853083"/>
-          </a:xfrm>
-          <a:prstGeom prst="rect">
+            <a:off x="406301" y="883593"/>
+            <a:ext cx="8331398" cy="3745706"/>
+          </a:xfrm>
+          <a:prstGeom prst="rect">
+            <a:avLst/>
+          </a:prstGeom>
+          <a:solidFill>
+            <a:srgbClr val="F4F8F9"/>
+          </a:solidFill>
+          <a:ln/>
+        </p:spPr>
+        <p:txBody>
+          <a:bodyPr wrap="square" rtlCol="0" anchor="ctr"/>
+          <a:lstStyle/>
+          <a:p>
+            <a:pPr indent="0" marL="0">
+              <a:buNone/>
+            </a:pPr>
+            <a:endParaRPr lang="en-US" dirty="0"/>
+          </a:p>
+        </p:txBody>
+      </p:sp>
+      <p:sp>
+        <p:nvSpPr>
+          <p:cNvPr id="5" name="Shape 3"/>
+          <p:cNvSpPr/>
+          <p:nvPr/>
+        </p:nvSpPr>
+        <p:spPr>
+          <a:xfrm>
+            <a:off x="434876" y="883593"/>
+            <a:ext cx="0" cy="3745706"/>
+          </a:xfrm>
+          <a:prstGeom prst="line">
             <a:avLst/>
           </a:prstGeom>
           <a:noFill/>
+          <a:ln w="57150">
+            <a:solidFill>
+              <a:srgbClr val="FE4447"/>
+            </a:solidFill>
+            <a:prstDash val="solid"/>
+          </a:ln>
+        </p:spPr>
+      </p:sp>
+      <p:sp>
+        <p:nvSpPr>
+          <p:cNvPr id="6" name="Text 4"/>
+          <p:cNvSpPr/>
+          <p:nvPr/>
+        </p:nvSpPr>
+        <p:spPr>
+          <a:xfrm>
+            <a:off x="692051" y="1074093"/>
+            <a:ext cx="7973389" cy="230981"/>
+          </a:xfrm>
+          <a:prstGeom prst="rect">
+            <a:avLst/>
+          </a:prstGeom>
+          <a:noFill/>
           <a:ln/>
         </p:spPr>
         <p:txBody>
@@ -2280,7 +2504,7 @@
           <a:p>
             <a:pPr algn="l" indent="0" marL="0">
               <a:lnSpc>
-                <a:spcPts val="1680"/>
+                <a:spcPts val="1820"/>
               </a:lnSpc>
               <a:spcBef>
                 <a:spcPts val="300"/>
@@ -2291,19 +2515,44 @@
               <a:buNone/>
             </a:pPr>
             <a:r>
-              <a:rPr lang="en-US" sz="1200" dirty="0">
-                <a:solidFill>
-                  <a:srgbClr val="1C2833"/>
-                </a:solidFill>
-                <a:latin typeface="Arial" pitchFamily="34" charset="0"/>
-                <a:ea typeface="Arial" pitchFamily="34" charset="-122"/>
-                <a:cs typeface="Arial" pitchFamily="34" charset="-120"/>
-              </a:rPr>
-              <a:t>– Common pacing error: pairs plan 8 poses in 5 min, each held for 20 sec — but transitions take time too. Cue: "Plan for 4–5 poses with 30–60 sec each, plus a couple of breath segments." – Routines for younger siblings often need </a:t>
-            </a:r>
+              <a:rPr lang="en-US" sz="1300" b="1" i="1" dirty="0">
+                <a:solidFill>
+                  <a:srgbClr val="1C2833"/>
+                </a:solidFill>
+                <a:latin typeface="Georgia" pitchFamily="34" charset="0"/>
+                <a:ea typeface="Georgia" pitchFamily="34" charset="-122"/>
+                <a:cs typeface="Georgia" pitchFamily="34" charset="-120"/>
+              </a:rPr>
+              <a:t>Project workshop — Session 1</a:t>
+            </a:r>
+            <a:endParaRPr lang="en-US" sz="1300" dirty="0"/>
+          </a:p>
+        </p:txBody>
+      </p:sp>
+      <p:sp>
+        <p:nvSpPr>
+          <p:cNvPr id="7" name="Text 5"/>
+          <p:cNvSpPr/>
+          <p:nvPr/>
+        </p:nvSpPr>
+        <p:spPr>
+          <a:xfrm>
+            <a:off x="692051" y="1343174"/>
+            <a:ext cx="7973389" cy="230981"/>
+          </a:xfrm>
+          <a:prstGeom prst="rect">
+            <a:avLst/>
+          </a:prstGeom>
+          <a:noFill/>
+          <a:ln/>
+        </p:spPr>
+        <p:txBody>
+          <a:bodyPr wrap="square" lIns="0" tIns="0" rIns="0" bIns="0" rtlCol="0" anchor="t"/>
+          <a:lstStyle/>
+          <a:p>
             <a:pPr algn="l" indent="0" marL="0">
               <a:lnSpc>
-                <a:spcPts val="1680"/>
+                <a:spcPts val="1820"/>
               </a:lnSpc>
               <a:spcBef>
                 <a:spcPts val="300"/>
@@ -2314,19 +2563,44 @@
               <a:buNone/>
             </a:pPr>
             <a:r>
-              <a:rPr lang="en-US" sz="1200" i="1" dirty="0">
-                <a:solidFill>
-                  <a:srgbClr val="1C2833"/>
-                </a:solidFill>
-                <a:latin typeface="Arial" pitchFamily="34" charset="0"/>
-                <a:ea typeface="Arial" pitchFamily="34" charset="-122"/>
-                <a:cs typeface="Arial" pitchFamily="34" charset="-120"/>
-              </a:rPr>
-              <a:t>engaging language</a:t>
-            </a:r>
+              <a:rPr lang="en-US" sz="1300" i="1" dirty="0">
+                <a:solidFill>
+                  <a:srgbClr val="1C2833"/>
+                </a:solidFill>
+                <a:latin typeface="Georgia" pitchFamily="34" charset="0"/>
+                <a:ea typeface="Georgia" pitchFamily="34" charset="-122"/>
+                <a:cs typeface="Georgia" pitchFamily="34" charset="-120"/>
+              </a:rPr>
+              <a:t>By end of class, your pair should have:</a:t>
+            </a:r>
+            <a:endParaRPr lang="en-US" sz="1300" dirty="0"/>
+          </a:p>
+        </p:txBody>
+      </p:sp>
+      <p:sp>
+        <p:nvSpPr>
+          <p:cNvPr id="8" name="Text 6"/>
+          <p:cNvSpPr/>
+          <p:nvPr/>
+        </p:nvSpPr>
+        <p:spPr>
+          <a:xfrm>
+            <a:off x="692051" y="1612255"/>
+            <a:ext cx="7973389" cy="230981"/>
+          </a:xfrm>
+          <a:prstGeom prst="rect">
+            <a:avLst/>
+          </a:prstGeom>
+          <a:noFill/>
+          <a:ln/>
+        </p:spPr>
+        <p:txBody>
+          <a:bodyPr wrap="square" lIns="0" tIns="0" rIns="0" bIns="0" rtlCol="0" anchor="t"/>
+          <a:lstStyle/>
+          <a:p>
             <a:pPr algn="l" indent="0" marL="0">
               <a:lnSpc>
-                <a:spcPts val="1680"/>
+                <a:spcPts val="1820"/>
               </a:lnSpc>
               <a:spcBef>
                 <a:spcPts val="300"/>
@@ -2337,29 +2611,267 @@
               <a:buNone/>
             </a:pPr>
             <a:r>
-              <a:rPr lang="en-US" sz="1200" dirty="0">
-                <a:solidFill>
-                  <a:srgbClr val="1C2833"/>
-                </a:solidFill>
-                <a:latin typeface="Arial" pitchFamily="34" charset="0"/>
-                <a:ea typeface="Arial" pitchFamily="34" charset="-122"/>
-                <a:cs typeface="Arial" pitchFamily="34" charset="-120"/>
-              </a:rPr>
-              <a:t> (animal poses, story narration). Encourage that. – A pre-exam routine should be calming, not energising — flag this if a pair plans something high-energy.</a:t>
-            </a:r>
-            <a:endParaRPr lang="en-US" sz="1200" dirty="0"/>
-          </a:p>
-        </p:txBody>
-      </p:sp>
-      <p:sp>
-        <p:nvSpPr>
-          <p:cNvPr id="5" name="Text 3"/>
-          <p:cNvSpPr/>
-          <p:nvPr/>
-        </p:nvSpPr>
-        <p:spPr>
-          <a:xfrm>
-            <a:off x="406301" y="4434929"/>
+              <a:rPr lang="en-US" sz="1300" i="1" dirty="0">
+                <a:solidFill>
+                  <a:srgbClr val="1C2833"/>
+                </a:solidFill>
+                <a:latin typeface="Georgia" pitchFamily="34" charset="0"/>
+                <a:ea typeface="Georgia" pitchFamily="34" charset="-122"/>
+                <a:cs typeface="Georgia" pitchFamily="34" charset="-120"/>
+              </a:rPr>
+              <a:t>A written outline of your 5-minute routine.</a:t>
+            </a:r>
+            <a:endParaRPr lang="en-US" sz="1300" dirty="0"/>
+          </a:p>
+        </p:txBody>
+      </p:sp>
+      <p:sp>
+        <p:nvSpPr>
+          <p:cNvPr id="9" name="Text 7"/>
+          <p:cNvSpPr/>
+          <p:nvPr/>
+        </p:nvSpPr>
+        <p:spPr>
+          <a:xfrm>
+            <a:off x="692051" y="1881336"/>
+            <a:ext cx="7973389" cy="230981"/>
+          </a:xfrm>
+          <a:prstGeom prst="rect">
+            <a:avLst/>
+          </a:prstGeom>
+          <a:noFill/>
+          <a:ln/>
+        </p:spPr>
+        <p:txBody>
+          <a:bodyPr wrap="square" lIns="0" tIns="0" rIns="0" bIns="0" rtlCol="0" anchor="t"/>
+          <a:lstStyle/>
+          <a:p>
+            <a:pPr algn="l" indent="0" marL="0">
+              <a:lnSpc>
+                <a:spcPts val="1820"/>
+              </a:lnSpc>
+              <a:spcBef>
+                <a:spcPts val="300"/>
+              </a:spcBef>
+              <a:spcAft>
+                <a:spcPts val="300"/>
+              </a:spcAft>
+              <a:buNone/>
+            </a:pPr>
+            <a:r>
+              <a:rPr lang="en-US" sz="1300" i="1" dirty="0">
+                <a:solidFill>
+                  <a:srgbClr val="1C2833"/>
+                </a:solidFill>
+                <a:latin typeface="Georgia" pitchFamily="34" charset="0"/>
+                <a:ea typeface="Georgia" pitchFamily="34" charset="-122"/>
+                <a:cs typeface="Georgia" pitchFamily="34" charset="-120"/>
+              </a:rPr>
+              <a:t>A storyboard drawing.</a:t>
+            </a:r>
+            <a:endParaRPr lang="en-US" sz="1300" dirty="0"/>
+          </a:p>
+        </p:txBody>
+      </p:sp>
+      <p:sp>
+        <p:nvSpPr>
+          <p:cNvPr id="10" name="Text 8"/>
+          <p:cNvSpPr/>
+          <p:nvPr/>
+        </p:nvSpPr>
+        <p:spPr>
+          <a:xfrm>
+            <a:off x="692051" y="2150418"/>
+            <a:ext cx="7973389" cy="230981"/>
+          </a:xfrm>
+          <a:prstGeom prst="rect">
+            <a:avLst/>
+          </a:prstGeom>
+          <a:noFill/>
+          <a:ln/>
+        </p:spPr>
+        <p:txBody>
+          <a:bodyPr wrap="square" lIns="0" tIns="0" rIns="0" bIns="0" rtlCol="0" anchor="t"/>
+          <a:lstStyle/>
+          <a:p>
+            <a:pPr algn="l" indent="0" marL="0">
+              <a:lnSpc>
+                <a:spcPts val="1820"/>
+              </a:lnSpc>
+              <a:spcBef>
+                <a:spcPts val="300"/>
+              </a:spcBef>
+              <a:spcAft>
+                <a:spcPts val="300"/>
+              </a:spcAft>
+              <a:buNone/>
+            </a:pPr>
+            <a:r>
+              <a:rPr lang="en-US" sz="1300" i="1" dirty="0">
+                <a:solidFill>
+                  <a:srgbClr val="1C2833"/>
+                </a:solidFill>
+                <a:latin typeface="Georgia" pitchFamily="34" charset="0"/>
+                <a:ea typeface="Georgia" pitchFamily="34" charset="-122"/>
+                <a:cs typeface="Georgia" pitchFamily="34" charset="-120"/>
+              </a:rPr>
+              <a:t>ONE physical run-through completed.</a:t>
+            </a:r>
+            <a:endParaRPr lang="en-US" sz="1300" dirty="0"/>
+          </a:p>
+        </p:txBody>
+      </p:sp>
+      <p:sp>
+        <p:nvSpPr>
+          <p:cNvPr id="11" name="Text 9"/>
+          <p:cNvSpPr/>
+          <p:nvPr/>
+        </p:nvSpPr>
+        <p:spPr>
+          <a:xfrm>
+            <a:off x="692051" y="2419499"/>
+            <a:ext cx="7973389" cy="230981"/>
+          </a:xfrm>
+          <a:prstGeom prst="rect">
+            <a:avLst/>
+          </a:prstGeom>
+          <a:noFill/>
+          <a:ln/>
+        </p:spPr>
+        <p:txBody>
+          <a:bodyPr wrap="square" lIns="0" tIns="0" rIns="0" bIns="0" rtlCol="0" anchor="t"/>
+          <a:lstStyle/>
+          <a:p>
+            <a:pPr algn="l" indent="0" marL="0">
+              <a:lnSpc>
+                <a:spcPts val="1820"/>
+              </a:lnSpc>
+              <a:spcBef>
+                <a:spcPts val="300"/>
+              </a:spcBef>
+              <a:spcAft>
+                <a:spcPts val="300"/>
+              </a:spcAft>
+              <a:buNone/>
+            </a:pPr>
+            <a:r>
+              <a:rPr lang="en-US" sz="1300" b="1" i="1" dirty="0">
+                <a:solidFill>
+                  <a:srgbClr val="1C2833"/>
+                </a:solidFill>
+                <a:latin typeface="Georgia" pitchFamily="34" charset="0"/>
+                <a:ea typeface="Georgia" pitchFamily="34" charset="-122"/>
+                <a:cs typeface="Georgia" pitchFamily="34" charset="-120"/>
+              </a:rPr>
+              <a:t>Outline template:</a:t>
+            </a:r>
+            <a:endParaRPr lang="en-US" sz="1300" dirty="0"/>
+          </a:p>
+        </p:txBody>
+      </p:sp>
+      <p:sp>
+        <p:nvSpPr>
+          <p:cNvPr id="12" name="Text 10"/>
+          <p:cNvSpPr/>
+          <p:nvPr/>
+        </p:nvSpPr>
+        <p:spPr>
+          <a:xfrm>
+            <a:off x="692051" y="2688580"/>
+            <a:ext cx="7973389" cy="1750219"/>
+          </a:xfrm>
+          <a:prstGeom prst="rect">
+            <a:avLst/>
+          </a:prstGeom>
+          <a:noFill/>
+          <a:ln/>
+        </p:spPr>
+        <p:txBody>
+          <a:bodyPr wrap="square" lIns="0" tIns="0" rIns="0" bIns="0" rtlCol="0" anchor="t"/>
+          <a:lstStyle/>
+          <a:p>
+            <a:pPr algn="l" indent="0" marL="0">
+              <a:lnSpc>
+                <a:spcPts val="1820"/>
+              </a:lnSpc>
+              <a:spcBef>
+                <a:spcPts val="300"/>
+              </a:spcBef>
+              <a:spcAft>
+                <a:spcPts val="300"/>
+              </a:spcAft>
+              <a:buNone/>
+            </a:pPr>
+            <a:r>
+              <a:rPr lang="en-US" sz="1300" dirty="0">
+                <a:solidFill>
+                  <a:srgbClr val="1C2833"/>
+                </a:solidFill>
+                <a:latin typeface="Georgia" pitchFamily="34" charset="0"/>
+                <a:ea typeface="Georgia" pitchFamily="34" charset="-122"/>
+                <a:cs typeface="Georgia" pitchFamily="34" charset="-120"/>
+              </a:rPr>
+              <a:t>``</a:t>
+            </a:r>
+            <a:pPr algn="l" indent="0" marL="0">
+              <a:lnSpc>
+                <a:spcPts val="1820"/>
+              </a:lnSpc>
+              <a:spcBef>
+                <a:spcPts val="300"/>
+              </a:spcBef>
+              <a:spcAft>
+                <a:spcPts val="300"/>
+              </a:spcAft>
+              <a:buNone/>
+            </a:pPr>
+            <a:r>
+              <a:rPr lang="en-US" sz="1300" i="1" dirty="0">
+                <a:solidFill>
+                  <a:srgbClr val="1C2833"/>
+                </a:solidFill>
+                <a:latin typeface="Georgia" pitchFamily="34" charset="0"/>
+                <a:ea typeface="Georgia" pitchFamily="34" charset="-122"/>
+                <a:cs typeface="Georgia" pitchFamily="34" charset="-120"/>
+              </a:rPr>
+              <a:t> Audience: __________ Goal of routine (calming / energising / focusing / restorative): __________ Sequence: 0:00–0:30 __________ (breath: __________) 0:30–1:00 __________ (breath: __________) 1:00–2:00 __________ (breath: __________) 2:00–3:30 __________ (breath: __________) 3:30–4:30 __________ (breath: __________) 4:30–5:00 __________ (breath: __________) Source citation: __________ Division of labour (Partner A leads sequences ____): __________ Division of labour (Partner B leads sequences ____): __________</a:t>
+            </a:r>
+            <a:pPr algn="l" indent="0" marL="0">
+              <a:lnSpc>
+                <a:spcPts val="1820"/>
+              </a:lnSpc>
+              <a:spcBef>
+                <a:spcPts val="300"/>
+              </a:spcBef>
+              <a:spcAft>
+                <a:spcPts val="300"/>
+              </a:spcAft>
+              <a:buNone/>
+            </a:pPr>
+            <a:r>
+              <a:rPr lang="en-US" sz="1300" dirty="0">
+                <a:solidFill>
+                  <a:srgbClr val="1C2833"/>
+                </a:solidFill>
+                <a:latin typeface="Georgia" pitchFamily="34" charset="0"/>
+                <a:ea typeface="Georgia" pitchFamily="34" charset="-122"/>
+                <a:cs typeface="Georgia" pitchFamily="34" charset="-120"/>
+              </a:rPr>
+              <a:t>``</a:t>
+            </a:r>
+            <a:endParaRPr lang="en-US" sz="1300" dirty="0"/>
+          </a:p>
+        </p:txBody>
+      </p:sp>
+      <p:sp>
+        <p:nvSpPr>
+          <p:cNvPr id="13" name="Text 11"/>
+          <p:cNvSpPr/>
+          <p:nvPr/>
+        </p:nvSpPr>
+        <p:spPr>
+          <a:xfrm>
+            <a:off x="406301" y="4794349"/>
             <a:ext cx="8498026" cy="213271"/>
           </a:xfrm>
           <a:prstGeom prst="rect">
@@ -2503,7 +3015,7 @@
                 <a:ea typeface="Georgia" pitchFamily="34" charset="-122"/>
                 <a:cs typeface="Georgia" pitchFamily="34" charset="-120"/>
               </a:rPr>
-              <a:t>Citation(s) used in this lesson</a:t>
+              <a:t>Homework</a:t>
             </a:r>
             <a:endParaRPr lang="en-US" sz="1800" dirty="0"/>
           </a:p>
@@ -2517,8 +3029,8 @@
         </p:nvSpPr>
         <p:spPr>
           <a:xfrm>
-            <a:off x="406301" y="870942"/>
-            <a:ext cx="8498026" cy="222796"/>
+            <a:off x="634901" y="883593"/>
+            <a:ext cx="8102798" cy="281880"/>
           </a:xfrm>
           <a:prstGeom prst="rect">
             <a:avLst/>
@@ -2530,17 +3042,15 @@
           <a:bodyPr wrap="square" lIns="0" tIns="0" rIns="0" bIns="0" rtlCol="0" anchor="t"/>
           <a:lstStyle/>
           <a:p>
-            <a:pPr algn="l" indent="0" marL="0">
-              <a:lnSpc>
-                <a:spcPts val="1680"/>
-              </a:lnSpc>
-              <a:spcBef>
-                <a:spcPts val="300"/>
-              </a:spcBef>
-              <a:spcAft>
-                <a:spcPts val="300"/>
-              </a:spcAft>
-              <a:buNone/>
+            <a:pPr algn="l" marL="342900" indent="-342900">
+              <a:lnSpc>
+                <a:spcPts val="1620"/>
+              </a:lnSpc>
+              <a:spcAft>
+                <a:spcPts val="300"/>
+              </a:spcAft>
+              <a:buSzPct val="100000"/>
+              <a:buChar char="•"/>
             </a:pPr>
             <a:r>
               <a:rPr lang="en-US" sz="1200" dirty="0">
@@ -2551,8 +3061,33 @@
                 <a:ea typeface="Arial" pitchFamily="34" charset="-122"/>
                 <a:cs typeface="Arial" pitchFamily="34" charset="-120"/>
               </a:rPr>
-              <a:t>– Pair-chosen source from </a:t>
-            </a:r>
+              <a:t>Whatever didn't get done in class: finish at home. Practise the routine 1 more time.</a:t>
+            </a:r>
+            <a:endParaRPr lang="en-US" sz="1200" dirty="0"/>
+          </a:p>
+        </p:txBody>
+      </p:sp>
+      <p:sp>
+        <p:nvSpPr>
+          <p:cNvPr id="5" name="Text 3"/>
+          <p:cNvSpPr/>
+          <p:nvPr/>
+        </p:nvSpPr>
+        <p:spPr>
+          <a:xfrm>
+            <a:off x="406301" y="4434929"/>
+            <a:ext cx="8498026" cy="213271"/>
+          </a:xfrm>
+          <a:prstGeom prst="rect">
+            <a:avLst/>
+          </a:prstGeom>
+          <a:noFill/>
+          <a:ln/>
+        </p:spPr>
+        <p:txBody>
+          <a:bodyPr wrap="square" lIns="0" tIns="0" rIns="0" bIns="0" rtlCol="0" anchor="t"/>
+          <a:lstStyle/>
+          <a:p>
             <a:pPr algn="l" indent="0" marL="0">
               <a:lnSpc>
                 <a:spcPts val="1680"/>
@@ -2574,15 +3109,748 @@
                 <a:ea typeface="Arial" pitchFamily="34" charset="-122"/>
                 <a:cs typeface="Arial" pitchFamily="34" charset="-120"/>
               </a:rPr>
+              <a:t>Middle ·  · IKS Curriculum</a:t>
+            </a:r>
+            <a:endParaRPr lang="en-US" sz="1200" dirty="0"/>
+          </a:p>
+        </p:txBody>
+      </p:sp>
+    </p:spTree>
+  </p:cSld>
+  <p:clrMapOvr>
+    <a:masterClrMapping/>
+  </p:clrMapOvr>
+</p:sld>
+</file>
+
+<file path=ppt/slides/slide12.xml><?xml version="1.0" encoding="utf-8"?>
+<p:sld xmlns:a="http://schemas.openxmlformats.org/drawingml/2006/main" xmlns:r="http://schemas.openxmlformats.org/officeDocument/2006/relationships" xmlns:p="http://schemas.openxmlformats.org/presentationml/2006/main">
+  <p:cSld name="Slide 12">
+    <p:bg>
+      <p:bgPr>
+        <a:solidFill>
+          <a:srgbClr val="FFFFFF"/>
+        </a:solidFill>
+      </p:bgPr>
+    </p:bg>
+    <p:spTree>
+      <p:nvGrpSpPr>
+        <p:cNvPr id="1" name=""/>
+        <p:cNvGrpSpPr/>
+        <p:nvPr/>
+      </p:nvGrpSpPr>
+      <p:grpSpPr>
+        <a:xfrm>
+          <a:off x="0" y="0"/>
+          <a:ext cx="0" cy="0"/>
+          <a:chOff x="0" y="0"/>
+          <a:chExt cx="0" cy="0"/>
+        </a:xfrm>
+      </p:grpSpPr>
+      <p:sp>
+        <p:nvSpPr>
+          <p:cNvPr id="2" name="Text 0"/>
+          <p:cNvSpPr/>
+          <p:nvPr/>
+        </p:nvSpPr>
+        <p:spPr>
+          <a:xfrm>
+            <a:off x="0" y="0"/>
+            <a:ext cx="9144000" cy="101501"/>
+          </a:xfrm>
+          <a:prstGeom prst="rect">
+            <a:avLst/>
+          </a:prstGeom>
+          <a:solidFill>
+            <a:srgbClr val="277884"/>
+          </a:solidFill>
+          <a:ln/>
+        </p:spPr>
+        <p:txBody>
+          <a:bodyPr wrap="square" rtlCol="0" anchor="ctr"/>
+          <a:lstStyle/>
+          <a:p>
+            <a:pPr indent="0" marL="0">
+              <a:buNone/>
+            </a:pPr>
+            <a:endParaRPr lang="en-US" dirty="0"/>
+          </a:p>
+        </p:txBody>
+      </p:sp>
+      <p:sp>
+        <p:nvSpPr>
+          <p:cNvPr id="3" name="Text 1"/>
+          <p:cNvSpPr/>
+          <p:nvPr/>
+        </p:nvSpPr>
+        <p:spPr>
+          <a:xfrm>
+            <a:off x="406301" y="457051"/>
+            <a:ext cx="8498026" cy="274290"/>
+          </a:xfrm>
+          <a:prstGeom prst="rect">
+            <a:avLst/>
+          </a:prstGeom>
+          <a:noFill/>
+          <a:ln/>
+        </p:spPr>
+        <p:txBody>
+          <a:bodyPr wrap="square" lIns="0" tIns="0" rIns="0" bIns="0" rtlCol="0" anchor="t"/>
+          <a:lstStyle/>
+          <a:p>
+            <a:pPr algn="l" indent="0" marL="0">
+              <a:lnSpc>
+                <a:spcPts val="2160"/>
+              </a:lnSpc>
+              <a:spcBef>
+                <a:spcPts val="600"/>
+              </a:spcBef>
+              <a:spcAft>
+                <a:spcPts val="800"/>
+              </a:spcAft>
+              <a:buNone/>
+            </a:pPr>
+            <a:r>
+              <a:rPr lang="en-US" sz="1800" b="1" dirty="0">
+                <a:solidFill>
+                  <a:srgbClr val="FE4447"/>
+                </a:solidFill>
+                <a:latin typeface="Georgia" pitchFamily="34" charset="0"/>
+                <a:ea typeface="Georgia" pitchFamily="34" charset="-122"/>
+                <a:cs typeface="Georgia" pitchFamily="34" charset="-120"/>
+              </a:rPr>
+              <a:t>Differentiation</a:t>
+            </a:r>
+            <a:endParaRPr lang="en-US" sz="1800" dirty="0"/>
+          </a:p>
+        </p:txBody>
+      </p:sp>
+      <p:sp>
+        <p:nvSpPr>
+          <p:cNvPr id="4" name="Text 2"/>
+          <p:cNvSpPr/>
+          <p:nvPr/>
+        </p:nvSpPr>
+        <p:spPr>
+          <a:xfrm>
+            <a:off x="634901" y="883593"/>
+            <a:ext cx="8102798" cy="731341"/>
+          </a:xfrm>
+          <a:prstGeom prst="rect">
+            <a:avLst/>
+          </a:prstGeom>
+          <a:noFill/>
+          <a:ln/>
+        </p:spPr>
+        <p:txBody>
+          <a:bodyPr wrap="square" lIns="0" tIns="0" rIns="0" bIns="0" rtlCol="0" anchor="t"/>
+          <a:lstStyle/>
+          <a:p>
+            <a:pPr algn="l" marL="342900" indent="-342900">
+              <a:lnSpc>
+                <a:spcPts val="1620"/>
+              </a:lnSpc>
+              <a:spcAft>
+                <a:spcPts val="300"/>
+              </a:spcAft>
+              <a:buSzPct val="100000"/>
+              <a:buChar char="•"/>
+            </a:pPr>
+            <a:r>
+              <a:rPr lang="en-US" sz="1200" b="1" dirty="0">
+                <a:solidFill>
+                  <a:srgbClr val="1C2833"/>
+                </a:solidFill>
+                <a:latin typeface="Arial" pitchFamily="34" charset="0"/>
+                <a:ea typeface="Arial" pitchFamily="34" charset="-122"/>
+                <a:cs typeface="Arial" pitchFamily="34" charset="-120"/>
+              </a:rPr>
+              <a:t>Tier up:</a:t>
+            </a:r>
+            <a:pPr algn="l" indent="0" marL="0">
+              <a:lnSpc>
+                <a:spcPts val="1620"/>
+              </a:lnSpc>
+              <a:spcAft>
+                <a:spcPts val="300"/>
+              </a:spcAft>
+              <a:buNone/>
+            </a:pPr>
+            <a:r>
+              <a:rPr lang="en-US" sz="1200" dirty="0">
+                <a:solidFill>
+                  <a:srgbClr val="1C2833"/>
+                </a:solidFill>
+                <a:latin typeface="Arial" pitchFamily="34" charset="0"/>
+                <a:ea typeface="Arial" pitchFamily="34" charset="-122"/>
+                <a:cs typeface="Arial" pitchFamily="34" charset="-120"/>
+              </a:rPr>
+              <a:t> Add a 30-second "intention setting" at the start and "savasana" at the end. Make the 5 min feel complete.</a:t>
+            </a:r>
+            <a:endParaRPr lang="en-US" sz="1200" dirty="0"/>
+          </a:p>
+          <a:p>
+            <a:pPr algn="l" marL="342900" indent="-342900">
+              <a:lnSpc>
+                <a:spcPts val="1620"/>
+              </a:lnSpc>
+              <a:spcAft>
+                <a:spcPts val="300"/>
+              </a:spcAft>
+              <a:buSzPct val="100000"/>
+              <a:buChar char="•"/>
+            </a:pPr>
+            <a:r>
+              <a:rPr lang="en-US" sz="1200" b="1" dirty="0">
+                <a:solidFill>
+                  <a:srgbClr val="1C2833"/>
+                </a:solidFill>
+                <a:latin typeface="Arial" pitchFamily="34" charset="0"/>
+                <a:ea typeface="Arial" pitchFamily="34" charset="-122"/>
+                <a:cs typeface="Arial" pitchFamily="34" charset="-120"/>
+              </a:rPr>
+              <a:t>Tier down:</a:t>
+            </a:r>
+            <a:pPr algn="l" indent="0" marL="0">
+              <a:lnSpc>
+                <a:spcPts val="1620"/>
+              </a:lnSpc>
+              <a:spcAft>
+                <a:spcPts val="300"/>
+              </a:spcAft>
+              <a:buNone/>
+            </a:pPr>
+            <a:r>
+              <a:rPr lang="en-US" sz="1200" dirty="0">
+                <a:solidFill>
+                  <a:srgbClr val="1C2833"/>
+                </a:solidFill>
+                <a:latin typeface="Arial" pitchFamily="34" charset="0"/>
+                <a:ea typeface="Arial" pitchFamily="34" charset="-122"/>
+                <a:cs typeface="Arial" pitchFamily="34" charset="-120"/>
+              </a:rPr>
+              <a:t> Reuse Day 7's stress-recovery sequence as your base; customise to your audience by adding 1–2 changes only.</a:t>
+            </a:r>
+            <a:endParaRPr lang="en-US" sz="1200" dirty="0"/>
+          </a:p>
+        </p:txBody>
+      </p:sp>
+      <p:sp>
+        <p:nvSpPr>
+          <p:cNvPr id="5" name="Text 3"/>
+          <p:cNvSpPr/>
+          <p:nvPr/>
+        </p:nvSpPr>
+        <p:spPr>
+          <a:xfrm>
+            <a:off x="406301" y="4434929"/>
+            <a:ext cx="8498026" cy="213271"/>
+          </a:xfrm>
+          <a:prstGeom prst="rect">
+            <a:avLst/>
+          </a:prstGeom>
+          <a:noFill/>
+          <a:ln/>
+        </p:spPr>
+        <p:txBody>
+          <a:bodyPr wrap="square" lIns="0" tIns="0" rIns="0" bIns="0" rtlCol="0" anchor="t"/>
+          <a:lstStyle/>
+          <a:p>
+            <a:pPr algn="l" indent="0" marL="0">
+              <a:lnSpc>
+                <a:spcPts val="1680"/>
+              </a:lnSpc>
+              <a:spcBef>
+                <a:spcPts val="300"/>
+              </a:spcBef>
+              <a:spcAft>
+                <a:spcPts val="300"/>
+              </a:spcAft>
+              <a:buNone/>
+            </a:pPr>
+            <a:r>
+              <a:rPr lang="en-US" sz="1200" dirty="0">
+                <a:solidFill>
+                  <a:srgbClr val="1C2833"/>
+                </a:solidFill>
+                <a:latin typeface="Arial" pitchFamily="34" charset="0"/>
+                <a:ea typeface="Arial" pitchFamily="34" charset="-122"/>
+                <a:cs typeface="Arial" pitchFamily="34" charset="-120"/>
+              </a:rPr>
+              <a:t>Middle ·  · IKS Curriculum</a:t>
+            </a:r>
+            <a:endParaRPr lang="en-US" sz="1200" dirty="0"/>
+          </a:p>
+        </p:txBody>
+      </p:sp>
+    </p:spTree>
+  </p:cSld>
+  <p:clrMapOvr>
+    <a:masterClrMapping/>
+  </p:clrMapOvr>
+</p:sld>
+</file>
+
+<file path=ppt/slides/slide13.xml><?xml version="1.0" encoding="utf-8"?>
+<p:sld xmlns:a="http://schemas.openxmlformats.org/drawingml/2006/main" xmlns:r="http://schemas.openxmlformats.org/officeDocument/2006/relationships" xmlns:p="http://schemas.openxmlformats.org/presentationml/2006/main">
+  <p:cSld name="Slide 13">
+    <p:bg>
+      <p:bgPr>
+        <a:solidFill>
+          <a:srgbClr val="FFFFFF"/>
+        </a:solidFill>
+      </p:bgPr>
+    </p:bg>
+    <p:spTree>
+      <p:nvGrpSpPr>
+        <p:cNvPr id="1" name=""/>
+        <p:cNvGrpSpPr/>
+        <p:nvPr/>
+      </p:nvGrpSpPr>
+      <p:grpSpPr>
+        <a:xfrm>
+          <a:off x="0" y="0"/>
+          <a:ext cx="0" cy="0"/>
+          <a:chOff x="0" y="0"/>
+          <a:chExt cx="0" cy="0"/>
+        </a:xfrm>
+      </p:grpSpPr>
+      <p:sp>
+        <p:nvSpPr>
+          <p:cNvPr id="2" name="Text 0"/>
+          <p:cNvSpPr/>
+          <p:nvPr/>
+        </p:nvSpPr>
+        <p:spPr>
+          <a:xfrm>
+            <a:off x="0" y="0"/>
+            <a:ext cx="9144000" cy="101501"/>
+          </a:xfrm>
+          <a:prstGeom prst="rect">
+            <a:avLst/>
+          </a:prstGeom>
+          <a:solidFill>
+            <a:srgbClr val="277884"/>
+          </a:solidFill>
+          <a:ln/>
+        </p:spPr>
+        <p:txBody>
+          <a:bodyPr wrap="square" rtlCol="0" anchor="ctr"/>
+          <a:lstStyle/>
+          <a:p>
+            <a:pPr indent="0" marL="0">
+              <a:buNone/>
+            </a:pPr>
+            <a:endParaRPr lang="en-US" dirty="0"/>
+          </a:p>
+        </p:txBody>
+      </p:sp>
+      <p:sp>
+        <p:nvSpPr>
+          <p:cNvPr id="3" name="Text 1"/>
+          <p:cNvSpPr/>
+          <p:nvPr/>
+        </p:nvSpPr>
+        <p:spPr>
+          <a:xfrm>
+            <a:off x="406301" y="457051"/>
+            <a:ext cx="8498026" cy="274290"/>
+          </a:xfrm>
+          <a:prstGeom prst="rect">
+            <a:avLst/>
+          </a:prstGeom>
+          <a:noFill/>
+          <a:ln/>
+        </p:spPr>
+        <p:txBody>
+          <a:bodyPr wrap="square" lIns="0" tIns="0" rIns="0" bIns="0" rtlCol="0" anchor="t"/>
+          <a:lstStyle/>
+          <a:p>
+            <a:pPr algn="l" indent="0" marL="0">
+              <a:lnSpc>
+                <a:spcPts val="2160"/>
+              </a:lnSpc>
+              <a:spcBef>
+                <a:spcPts val="600"/>
+              </a:spcBef>
+              <a:spcAft>
+                <a:spcPts val="800"/>
+              </a:spcAft>
+              <a:buNone/>
+            </a:pPr>
+            <a:r>
+              <a:rPr lang="en-US" sz="1800" b="1" dirty="0">
+                <a:solidFill>
+                  <a:srgbClr val="FE4447"/>
+                </a:solidFill>
+                <a:latin typeface="Georgia" pitchFamily="34" charset="0"/>
+                <a:ea typeface="Georgia" pitchFamily="34" charset="-122"/>
+                <a:cs typeface="Georgia" pitchFamily="34" charset="-120"/>
+              </a:rPr>
+              <a:t>Teacher notes</a:t>
+            </a:r>
+            <a:endParaRPr lang="en-US" sz="1800" dirty="0"/>
+          </a:p>
+        </p:txBody>
+      </p:sp>
+      <p:sp>
+        <p:nvSpPr>
+          <p:cNvPr id="4" name="Text 2"/>
+          <p:cNvSpPr/>
+          <p:nvPr/>
+        </p:nvSpPr>
+        <p:spPr>
+          <a:xfrm>
+            <a:off x="634901" y="883593"/>
+            <a:ext cx="8102798" cy="975122"/>
+          </a:xfrm>
+          <a:prstGeom prst="rect">
+            <a:avLst/>
+          </a:prstGeom>
+          <a:noFill/>
+          <a:ln/>
+        </p:spPr>
+        <p:txBody>
+          <a:bodyPr wrap="square" lIns="0" tIns="0" rIns="0" bIns="0" rtlCol="0" anchor="t"/>
+          <a:lstStyle/>
+          <a:p>
+            <a:pPr algn="l" marL="342900" indent="-342900">
+              <a:lnSpc>
+                <a:spcPts val="1620"/>
+              </a:lnSpc>
+              <a:spcAft>
+                <a:spcPts val="300"/>
+              </a:spcAft>
+              <a:buSzPct val="100000"/>
+              <a:buChar char="•"/>
+            </a:pPr>
+            <a:r>
+              <a:rPr lang="en-US" sz="1200" dirty="0">
+                <a:solidFill>
+                  <a:srgbClr val="1C2833"/>
+                </a:solidFill>
+                <a:latin typeface="Arial" pitchFamily="34" charset="0"/>
+                <a:ea typeface="Arial" pitchFamily="34" charset="-122"/>
+                <a:cs typeface="Arial" pitchFamily="34" charset="-120"/>
+              </a:rPr>
+              <a:t>Common pacing error: pairs plan 8 poses in 5 min, each held for 20 sec — but transitions take time too. Cue: "Plan for 4–5 poses with 30–60 sec each, plus a couple of breath segments."</a:t>
+            </a:r>
+            <a:endParaRPr lang="en-US" sz="1200" dirty="0"/>
+          </a:p>
+          <a:p>
+            <a:pPr algn="l" marL="342900" indent="-342900">
+              <a:lnSpc>
+                <a:spcPts val="1620"/>
+              </a:lnSpc>
+              <a:spcAft>
+                <a:spcPts val="300"/>
+              </a:spcAft>
+              <a:buSzPct val="100000"/>
+              <a:buChar char="•"/>
+            </a:pPr>
+            <a:r>
+              <a:rPr lang="en-US" sz="1200" dirty="0">
+                <a:solidFill>
+                  <a:srgbClr val="1C2833"/>
+                </a:solidFill>
+                <a:latin typeface="Arial" pitchFamily="34" charset="0"/>
+                <a:ea typeface="Arial" pitchFamily="34" charset="-122"/>
+                <a:cs typeface="Arial" pitchFamily="34" charset="-120"/>
+              </a:rPr>
+              <a:t>Routines for younger siblings often need </a:t>
+            </a:r>
+            <a:pPr algn="l" indent="0" marL="0">
+              <a:lnSpc>
+                <a:spcPts val="1620"/>
+              </a:lnSpc>
+              <a:spcAft>
+                <a:spcPts val="300"/>
+              </a:spcAft>
+              <a:buNone/>
+            </a:pPr>
+            <a:r>
+              <a:rPr lang="en-US" sz="1200" i="1" dirty="0">
+                <a:solidFill>
+                  <a:srgbClr val="1C2833"/>
+                </a:solidFill>
+                <a:latin typeface="Arial" pitchFamily="34" charset="0"/>
+                <a:ea typeface="Arial" pitchFamily="34" charset="-122"/>
+                <a:cs typeface="Arial" pitchFamily="34" charset="-120"/>
+              </a:rPr>
+              <a:t>engaging language</a:t>
+            </a:r>
+            <a:pPr algn="l" indent="0" marL="0">
+              <a:lnSpc>
+                <a:spcPts val="1620"/>
+              </a:lnSpc>
+              <a:spcAft>
+                <a:spcPts val="300"/>
+              </a:spcAft>
+              <a:buNone/>
+            </a:pPr>
+            <a:r>
+              <a:rPr lang="en-US" sz="1200" dirty="0">
+                <a:solidFill>
+                  <a:srgbClr val="1C2833"/>
+                </a:solidFill>
+                <a:latin typeface="Arial" pitchFamily="34" charset="0"/>
+                <a:ea typeface="Arial" pitchFamily="34" charset="-122"/>
+                <a:cs typeface="Arial" pitchFamily="34" charset="-120"/>
+              </a:rPr>
+              <a:t> (animal poses, story narration). Encourage that.</a:t>
+            </a:r>
+            <a:endParaRPr lang="en-US" sz="1200" dirty="0"/>
+          </a:p>
+          <a:p>
+            <a:pPr algn="l" marL="342900" indent="-342900">
+              <a:lnSpc>
+                <a:spcPts val="1620"/>
+              </a:lnSpc>
+              <a:spcAft>
+                <a:spcPts val="300"/>
+              </a:spcAft>
+              <a:buSzPct val="100000"/>
+              <a:buChar char="•"/>
+            </a:pPr>
+            <a:r>
+              <a:rPr lang="en-US" sz="1200" dirty="0">
+                <a:solidFill>
+                  <a:srgbClr val="1C2833"/>
+                </a:solidFill>
+                <a:latin typeface="Arial" pitchFamily="34" charset="0"/>
+                <a:ea typeface="Arial" pitchFamily="34" charset="-122"/>
+                <a:cs typeface="Arial" pitchFamily="34" charset="-120"/>
+              </a:rPr>
+              <a:t>A pre-exam routine should be calming, not energising — flag this if a pair plans something high-energy.</a:t>
+            </a:r>
+            <a:endParaRPr lang="en-US" sz="1200" dirty="0"/>
+          </a:p>
+        </p:txBody>
+      </p:sp>
+      <p:sp>
+        <p:nvSpPr>
+          <p:cNvPr id="5" name="Text 3"/>
+          <p:cNvSpPr/>
+          <p:nvPr/>
+        </p:nvSpPr>
+        <p:spPr>
+          <a:xfrm>
+            <a:off x="406301" y="4434929"/>
+            <a:ext cx="8498026" cy="213271"/>
+          </a:xfrm>
+          <a:prstGeom prst="rect">
+            <a:avLst/>
+          </a:prstGeom>
+          <a:noFill/>
+          <a:ln/>
+        </p:spPr>
+        <p:txBody>
+          <a:bodyPr wrap="square" lIns="0" tIns="0" rIns="0" bIns="0" rtlCol="0" anchor="t"/>
+          <a:lstStyle/>
+          <a:p>
+            <a:pPr algn="l" indent="0" marL="0">
+              <a:lnSpc>
+                <a:spcPts val="1680"/>
+              </a:lnSpc>
+              <a:spcBef>
+                <a:spcPts val="300"/>
+              </a:spcBef>
+              <a:spcAft>
+                <a:spcPts val="300"/>
+              </a:spcAft>
+              <a:buNone/>
+            </a:pPr>
+            <a:r>
+              <a:rPr lang="en-US" sz="1200" dirty="0">
+                <a:solidFill>
+                  <a:srgbClr val="1C2833"/>
+                </a:solidFill>
+                <a:latin typeface="Arial" pitchFamily="34" charset="0"/>
+                <a:ea typeface="Arial" pitchFamily="34" charset="-122"/>
+                <a:cs typeface="Arial" pitchFamily="34" charset="-120"/>
+              </a:rPr>
+              <a:t>Middle ·  · IKS Curriculum</a:t>
+            </a:r>
+            <a:endParaRPr lang="en-US" sz="1200" dirty="0"/>
+          </a:p>
+        </p:txBody>
+      </p:sp>
+    </p:spTree>
+  </p:cSld>
+  <p:clrMapOvr>
+    <a:masterClrMapping/>
+  </p:clrMapOvr>
+</p:sld>
+</file>
+
+<file path=ppt/slides/slide14.xml><?xml version="1.0" encoding="utf-8"?>
+<p:sld xmlns:a="http://schemas.openxmlformats.org/drawingml/2006/main" xmlns:r="http://schemas.openxmlformats.org/officeDocument/2006/relationships" xmlns:p="http://schemas.openxmlformats.org/presentationml/2006/main">
+  <p:cSld name="Slide 14">
+    <p:bg>
+      <p:bgPr>
+        <a:solidFill>
+          <a:srgbClr val="FFFFFF"/>
+        </a:solidFill>
+      </p:bgPr>
+    </p:bg>
+    <p:spTree>
+      <p:nvGrpSpPr>
+        <p:cNvPr id="1" name=""/>
+        <p:cNvGrpSpPr/>
+        <p:nvPr/>
+      </p:nvGrpSpPr>
+      <p:grpSpPr>
+        <a:xfrm>
+          <a:off x="0" y="0"/>
+          <a:ext cx="0" cy="0"/>
+          <a:chOff x="0" y="0"/>
+          <a:chExt cx="0" cy="0"/>
+        </a:xfrm>
+      </p:grpSpPr>
+      <p:sp>
+        <p:nvSpPr>
+          <p:cNvPr id="2" name="Text 0"/>
+          <p:cNvSpPr/>
+          <p:nvPr/>
+        </p:nvSpPr>
+        <p:spPr>
+          <a:xfrm>
+            <a:off x="0" y="0"/>
+            <a:ext cx="9144000" cy="101501"/>
+          </a:xfrm>
+          <a:prstGeom prst="rect">
+            <a:avLst/>
+          </a:prstGeom>
+          <a:solidFill>
+            <a:srgbClr val="277884"/>
+          </a:solidFill>
+          <a:ln/>
+        </p:spPr>
+        <p:txBody>
+          <a:bodyPr wrap="square" rtlCol="0" anchor="ctr"/>
+          <a:lstStyle/>
+          <a:p>
+            <a:pPr indent="0" marL="0">
+              <a:buNone/>
+            </a:pPr>
+            <a:endParaRPr lang="en-US" dirty="0"/>
+          </a:p>
+        </p:txBody>
+      </p:sp>
+      <p:sp>
+        <p:nvSpPr>
+          <p:cNvPr id="3" name="Text 1"/>
+          <p:cNvSpPr/>
+          <p:nvPr/>
+        </p:nvSpPr>
+        <p:spPr>
+          <a:xfrm>
+            <a:off x="406301" y="457051"/>
+            <a:ext cx="8498026" cy="274290"/>
+          </a:xfrm>
+          <a:prstGeom prst="rect">
+            <a:avLst/>
+          </a:prstGeom>
+          <a:noFill/>
+          <a:ln/>
+        </p:spPr>
+        <p:txBody>
+          <a:bodyPr wrap="square" lIns="0" tIns="0" rIns="0" bIns="0" rtlCol="0" anchor="t"/>
+          <a:lstStyle/>
+          <a:p>
+            <a:pPr algn="l" indent="0" marL="0">
+              <a:lnSpc>
+                <a:spcPts val="2160"/>
+              </a:lnSpc>
+              <a:spcBef>
+                <a:spcPts val="600"/>
+              </a:spcBef>
+              <a:spcAft>
+                <a:spcPts val="800"/>
+              </a:spcAft>
+              <a:buNone/>
+            </a:pPr>
+            <a:r>
+              <a:rPr lang="en-US" sz="1800" b="1" dirty="0">
+                <a:solidFill>
+                  <a:srgbClr val="FE4447"/>
+                </a:solidFill>
+                <a:latin typeface="Georgia" pitchFamily="34" charset="0"/>
+                <a:ea typeface="Georgia" pitchFamily="34" charset="-122"/>
+                <a:cs typeface="Georgia" pitchFamily="34" charset="-120"/>
+              </a:rPr>
+              <a:t>Citation(s) used in this lesson</a:t>
+            </a:r>
+            <a:endParaRPr lang="en-US" sz="1800" dirty="0"/>
+          </a:p>
+        </p:txBody>
+      </p:sp>
+      <p:sp>
+        <p:nvSpPr>
+          <p:cNvPr id="4" name="Text 2"/>
+          <p:cNvSpPr/>
+          <p:nvPr/>
+        </p:nvSpPr>
+        <p:spPr>
+          <a:xfrm>
+            <a:off x="634901" y="883593"/>
+            <a:ext cx="8102798" cy="300930"/>
+          </a:xfrm>
+          <a:prstGeom prst="rect">
+            <a:avLst/>
+          </a:prstGeom>
+          <a:noFill/>
+          <a:ln/>
+        </p:spPr>
+        <p:txBody>
+          <a:bodyPr wrap="square" lIns="0" tIns="0" rIns="0" bIns="0" rtlCol="0" anchor="t"/>
+          <a:lstStyle/>
+          <a:p>
+            <a:pPr algn="l" marL="342900" indent="-342900">
+              <a:lnSpc>
+                <a:spcPts val="1620"/>
+              </a:lnSpc>
+              <a:spcAft>
+                <a:spcPts val="300"/>
+              </a:spcAft>
+              <a:buSzPct val="100000"/>
+              <a:buChar char="•"/>
+            </a:pPr>
+            <a:r>
+              <a:rPr lang="en-US" sz="1200" dirty="0">
+                <a:solidFill>
+                  <a:srgbClr val="1C2833"/>
+                </a:solidFill>
+                <a:latin typeface="Arial" pitchFamily="34" charset="0"/>
+                <a:ea typeface="Arial" pitchFamily="34" charset="-122"/>
+                <a:cs typeface="Arial" pitchFamily="34" charset="-120"/>
+              </a:rPr>
+              <a:t>Pair-chosen source from </a:t>
+            </a:r>
+            <a:pPr algn="l" indent="0" marL="0">
+              <a:lnSpc>
+                <a:spcPts val="1620"/>
+              </a:lnSpc>
+              <a:spcAft>
+                <a:spcPts val="300"/>
+              </a:spcAft>
+              <a:buNone/>
+            </a:pPr>
+            <a:r>
+              <a:rPr lang="en-US" sz="1200" dirty="0">
+                <a:solidFill>
+                  <a:srgbClr val="1C2833"/>
+                </a:solidFill>
+                <a:latin typeface="Arial" pitchFamily="34" charset="0"/>
+                <a:ea typeface="Arial" pitchFamily="34" charset="-122"/>
+                <a:cs typeface="Arial" pitchFamily="34" charset="-120"/>
+              </a:rPr>
               <a:t>sources.md</a:t>
             </a:r>
             <a:pPr algn="l" indent="0" marL="0">
               <a:lnSpc>
-                <a:spcPts val="1680"/>
-              </a:lnSpc>
-              <a:spcBef>
-                <a:spcPts val="300"/>
-              </a:spcBef>
+                <a:spcPts val="1620"/>
+              </a:lnSpc>
               <a:spcAft>
                 <a:spcPts val="300"/>
               </a:spcAft>
@@ -2755,7 +4023,7 @@
                 <a:ea typeface="Georgia" pitchFamily="34" charset="-122"/>
                 <a:cs typeface="Georgia" pitchFamily="34" charset="-120"/>
               </a:rPr>
-              <a:t>Materials</a:t>
+              <a:t>Learning objective</a:t>
             </a:r>
             <a:endParaRPr lang="en-US" sz="1800" dirty="0"/>
           </a:p>
@@ -2770,7 +4038,7 @@
         <p:spPr>
           <a:xfrm>
             <a:off x="406301" y="870942"/>
-            <a:ext cx="8498026" cy="213271"/>
+            <a:ext cx="8498026" cy="426541"/>
           </a:xfrm>
           <a:prstGeom prst="rect">
             <a:avLst/>
@@ -2803,7 +4071,7 @@
                 <a:ea typeface="Arial" pitchFamily="34" charset="-122"/>
                 <a:cs typeface="Arial" pitchFamily="34" charset="-120"/>
               </a:rPr>
-              <a:t>– All project planning materials. – Printed rubric per pair. – Stopwatch.</a:t>
+              <a:t>By the end of this lesson, every pair will have a written outline of a 5-minute yoga routine for their chosen audience, including specific āsanas, a breath element, and one source citation.</a:t>
             </a:r>
             <a:endParaRPr lang="en-US" sz="1200" dirty="0"/>
           </a:p>
@@ -2961,7 +4229,7 @@
                 <a:ea typeface="Georgia" pitchFamily="34" charset="-122"/>
                 <a:cs typeface="Georgia" pitchFamily="34" charset="-120"/>
               </a:rPr>
-              <a:t>Lesson flow</a:t>
+              <a:t>Materials</a:t>
             </a:r>
             <a:endParaRPr lang="en-US" sz="1800" dirty="0"/>
           </a:p>
@@ -2970,6 +4238,100 @@
       <p:sp>
         <p:nvSpPr>
           <p:cNvPr id="4" name="Text 2"/>
+          <p:cNvSpPr/>
+          <p:nvPr/>
+        </p:nvSpPr>
+        <p:spPr>
+          <a:xfrm>
+            <a:off x="634901" y="883593"/>
+            <a:ext cx="8102798" cy="769441"/>
+          </a:xfrm>
+          <a:prstGeom prst="rect">
+            <a:avLst/>
+          </a:prstGeom>
+          <a:noFill/>
+          <a:ln/>
+        </p:spPr>
+        <p:txBody>
+          <a:bodyPr wrap="square" lIns="0" tIns="0" rIns="0" bIns="0" rtlCol="0" anchor="t"/>
+          <a:lstStyle/>
+          <a:p>
+            <a:pPr algn="l" marL="342900" indent="-342900">
+              <a:lnSpc>
+                <a:spcPts val="1620"/>
+              </a:lnSpc>
+              <a:spcAft>
+                <a:spcPts val="300"/>
+              </a:spcAft>
+              <a:buSzPct val="100000"/>
+              <a:buChar char="•"/>
+            </a:pPr>
+            <a:r>
+              <a:rPr lang="en-US" sz="1200" dirty="0">
+                <a:solidFill>
+                  <a:srgbClr val="1C2833"/>
+                </a:solidFill>
+                <a:latin typeface="Arial" pitchFamily="34" charset="0"/>
+                <a:ea typeface="Arial" pitchFamily="34" charset="-122"/>
+                <a:cs typeface="Arial" pitchFamily="34" charset="-120"/>
+              </a:rPr>
+              <a:t>All project planning materials.</a:t>
+            </a:r>
+            <a:endParaRPr lang="en-US" sz="1200" dirty="0"/>
+          </a:p>
+          <a:p>
+            <a:pPr algn="l" marL="342900" indent="-342900">
+              <a:lnSpc>
+                <a:spcPts val="1620"/>
+              </a:lnSpc>
+              <a:spcAft>
+                <a:spcPts val="300"/>
+              </a:spcAft>
+              <a:buSzPct val="100000"/>
+              <a:buChar char="•"/>
+            </a:pPr>
+            <a:r>
+              <a:rPr lang="en-US" sz="1200" dirty="0">
+                <a:solidFill>
+                  <a:srgbClr val="1C2833"/>
+                </a:solidFill>
+                <a:latin typeface="Arial" pitchFamily="34" charset="0"/>
+                <a:ea typeface="Arial" pitchFamily="34" charset="-122"/>
+                <a:cs typeface="Arial" pitchFamily="34" charset="-120"/>
+              </a:rPr>
+              <a:t>Printed rubric per pair.</a:t>
+            </a:r>
+            <a:endParaRPr lang="en-US" sz="1200" dirty="0"/>
+          </a:p>
+          <a:p>
+            <a:pPr algn="l" marL="342900" indent="-342900">
+              <a:lnSpc>
+                <a:spcPts val="1620"/>
+              </a:lnSpc>
+              <a:spcAft>
+                <a:spcPts val="300"/>
+              </a:spcAft>
+              <a:buSzPct val="100000"/>
+              <a:buChar char="•"/>
+            </a:pPr>
+            <a:r>
+              <a:rPr lang="en-US" sz="1200" dirty="0">
+                <a:solidFill>
+                  <a:srgbClr val="1C2833"/>
+                </a:solidFill>
+                <a:latin typeface="Arial" pitchFamily="34" charset="0"/>
+                <a:ea typeface="Arial" pitchFamily="34" charset="-122"/>
+                <a:cs typeface="Arial" pitchFamily="34" charset="-120"/>
+              </a:rPr>
+              <a:t>Stopwatch.</a:t>
+            </a:r>
+            <a:endParaRPr lang="en-US" sz="1200" dirty="0"/>
+          </a:p>
+        </p:txBody>
+      </p:sp>
+      <p:sp>
+        <p:nvSpPr>
+          <p:cNvPr id="5" name="Text 3"/>
           <p:cNvSpPr/>
           <p:nvPr/>
         </p:nvSpPr>
@@ -3119,7 +4481,7 @@
                 <a:ea typeface="Georgia" pitchFamily="34" charset="-122"/>
                 <a:cs typeface="Georgia" pitchFamily="34" charset="-120"/>
               </a:rPr>
-              <a:t>Settle (2 min)</a:t>
+              <a:t>Lesson flow</a:t>
             </a:r>
             <a:endParaRPr lang="en-US" sz="1800" dirty="0"/>
           </a:p>
@@ -3128,54 +4490,6 @@
       <p:sp>
         <p:nvSpPr>
           <p:cNvPr id="4" name="Text 2"/>
-          <p:cNvSpPr/>
-          <p:nvPr/>
-        </p:nvSpPr>
-        <p:spPr>
-          <a:xfrm>
-            <a:off x="406301" y="870942"/>
-            <a:ext cx="8498026" cy="213271"/>
-          </a:xfrm>
-          <a:prstGeom prst="rect">
-            <a:avLst/>
-          </a:prstGeom>
-          <a:noFill/>
-          <a:ln/>
-        </p:spPr>
-        <p:txBody>
-          <a:bodyPr wrap="square" lIns="0" tIns="0" rIns="0" bIns="0" rtlCol="0" anchor="t"/>
-          <a:lstStyle/>
-          <a:p>
-            <a:pPr algn="l" indent="0" marL="0">
-              <a:lnSpc>
-                <a:spcPts val="1680"/>
-              </a:lnSpc>
-              <a:spcBef>
-                <a:spcPts val="300"/>
-              </a:spcBef>
-              <a:spcAft>
-                <a:spcPts val="300"/>
-              </a:spcAft>
-              <a:buNone/>
-            </a:pPr>
-            <a:r>
-              <a:rPr lang="en-US" sz="1200" dirty="0">
-                <a:solidFill>
-                  <a:srgbClr val="1C2833"/>
-                </a:solidFill>
-                <a:latin typeface="Arial" pitchFamily="34" charset="0"/>
-                <a:ea typeface="Arial" pitchFamily="34" charset="-122"/>
-                <a:cs typeface="Arial" pitchFamily="34" charset="-120"/>
-              </a:rPr>
-              <a:t>– Sukhāsana. 5 breaths.</a:t>
-            </a:r>
-            <a:endParaRPr lang="en-US" sz="1200" dirty="0"/>
-          </a:p>
-        </p:txBody>
-      </p:sp>
-      <p:sp>
-        <p:nvSpPr>
-          <p:cNvPr id="5" name="Text 3"/>
           <p:cNvSpPr/>
           <p:nvPr/>
         </p:nvSpPr>
@@ -3325,7 +4639,7 @@
                 <a:ea typeface="Georgia" pitchFamily="34" charset="-122"/>
                 <a:cs typeface="Georgia" pitchFamily="34" charset="-120"/>
               </a:rPr>
-              <a:t>Core (35 min) — Three sprints</a:t>
+              <a:t>Settle (2 min)</a:t>
             </a:r>
             <a:endParaRPr lang="en-US" sz="1800" dirty="0"/>
           </a:p>
@@ -3339,8 +4653,8 @@
         </p:nvSpPr>
         <p:spPr>
           <a:xfrm>
-            <a:off x="406301" y="870942"/>
-            <a:ext cx="8498026" cy="639812"/>
+            <a:off x="634901" y="883593"/>
+            <a:ext cx="8102798" cy="281880"/>
           </a:xfrm>
           <a:prstGeom prst="rect">
             <a:avLst/>
@@ -3352,20 +4666,18 @@
           <a:bodyPr wrap="square" lIns="0" tIns="0" rIns="0" bIns="0" rtlCol="0" anchor="t"/>
           <a:lstStyle/>
           <a:p>
-            <a:pPr algn="l" indent="0" marL="0">
-              <a:lnSpc>
-                <a:spcPts val="1680"/>
-              </a:lnSpc>
-              <a:spcBef>
-                <a:spcPts val="300"/>
-              </a:spcBef>
-              <a:spcAft>
-                <a:spcPts val="300"/>
-              </a:spcAft>
-              <a:buNone/>
-            </a:pPr>
-            <a:r>
-              <a:rPr lang="en-US" sz="1200" b="1" dirty="0">
+            <a:pPr algn="l" marL="342900" indent="-342900">
+              <a:lnSpc>
+                <a:spcPts val="1620"/>
+              </a:lnSpc>
+              <a:spcAft>
+                <a:spcPts val="300"/>
+              </a:spcAft>
+              <a:buSzPct val="100000"/>
+              <a:buChar char="•"/>
+            </a:pPr>
+            <a:r>
+              <a:rPr lang="en-US" sz="1200" dirty="0">
                 <a:solidFill>
                   <a:srgbClr val="1C2833"/>
                 </a:solidFill>
@@ -3373,30 +4685,7 @@
                 <a:ea typeface="Arial" pitchFamily="34" charset="-122"/>
                 <a:cs typeface="Arial" pitchFamily="34" charset="-120"/>
               </a:rPr>
-              <a:t>Sprint 1 (10 min) — Plan.</a:t>
-            </a:r>
-            <a:pPr algn="l" indent="0" marL="0">
-              <a:lnSpc>
-                <a:spcPts val="1680"/>
-              </a:lnSpc>
-              <a:spcBef>
-                <a:spcPts val="300"/>
-              </a:spcBef>
-              <a:spcAft>
-                <a:spcPts val="300"/>
-              </a:spcAft>
-              <a:buNone/>
-            </a:pPr>
-            <a:r>
-              <a:rPr lang="en-US" sz="1200" dirty="0">
-                <a:solidFill>
-                  <a:srgbClr val="1C2833"/>
-                </a:solidFill>
-                <a:latin typeface="Arial" pitchFamily="34" charset="0"/>
-                <a:ea typeface="Arial" pitchFamily="34" charset="-122"/>
-                <a:cs typeface="Arial" pitchFamily="34" charset="-120"/>
-              </a:rPr>
-              <a:t> Pairs finalise: – Target audience (peers / parents / younger siblings / pre-exam classmates) – 5-minute sequence outline (which āsanas, in what order, with timing) – A breath element (counted breath or natural-breath segment) – The source they'll cite (verse, sūtra, or PDF reference) – Division of labour for the Day 10 demonstration</a:t>
+              <a:t>Sukhāsana. 5 breaths.</a:t>
             </a:r>
             <a:endParaRPr lang="en-US" sz="1200" dirty="0"/>
           </a:p>
@@ -3405,196 +4694,6 @@
       <p:sp>
         <p:nvSpPr>
           <p:cNvPr id="5" name="Text 3"/>
-          <p:cNvSpPr/>
-          <p:nvPr/>
-        </p:nvSpPr>
-        <p:spPr>
-          <a:xfrm>
-            <a:off x="406301" y="1586954"/>
-            <a:ext cx="8498026" cy="426541"/>
-          </a:xfrm>
-          <a:prstGeom prst="rect">
-            <a:avLst/>
-          </a:prstGeom>
-          <a:noFill/>
-          <a:ln/>
-        </p:spPr>
-        <p:txBody>
-          <a:bodyPr wrap="square" lIns="0" tIns="0" rIns="0" bIns="0" rtlCol="0" anchor="t"/>
-          <a:lstStyle/>
-          <a:p>
-            <a:pPr algn="l" indent="0" marL="0">
-              <a:lnSpc>
-                <a:spcPts val="1680"/>
-              </a:lnSpc>
-              <a:spcBef>
-                <a:spcPts val="300"/>
-              </a:spcBef>
-              <a:spcAft>
-                <a:spcPts val="300"/>
-              </a:spcAft>
-              <a:buNone/>
-            </a:pPr>
-            <a:r>
-              <a:rPr lang="en-US" sz="1200" b="1" dirty="0">
-                <a:solidFill>
-                  <a:srgbClr val="1C2833"/>
-                </a:solidFill>
-                <a:latin typeface="Arial" pitchFamily="34" charset="0"/>
-                <a:ea typeface="Arial" pitchFamily="34" charset="-122"/>
-                <a:cs typeface="Arial" pitchFamily="34" charset="-120"/>
-              </a:rPr>
-              <a:t>Sprint 2 (10 min) — Storyboard the sequence.</a:t>
-            </a:r>
-            <a:pPr algn="l" indent="0" marL="0">
-              <a:lnSpc>
-                <a:spcPts val="1680"/>
-              </a:lnSpc>
-              <a:spcBef>
-                <a:spcPts val="300"/>
-              </a:spcBef>
-              <a:spcAft>
-                <a:spcPts val="300"/>
-              </a:spcAft>
-              <a:buNone/>
-            </a:pPr>
-            <a:r>
-              <a:rPr lang="en-US" sz="1200" dirty="0">
-                <a:solidFill>
-                  <a:srgbClr val="1C2833"/>
-                </a:solidFill>
-                <a:latin typeface="Arial" pitchFamily="34" charset="0"/>
-                <a:ea typeface="Arial" pitchFamily="34" charset="-122"/>
-                <a:cs typeface="Arial" pitchFamily="34" charset="-120"/>
-              </a:rPr>
-              <a:t> On paper: – Draw each pose (stick figures fine) – Write the breath cue under each – Add time per pose – Total should be 5 minutes ± 30 seconds</a:t>
-            </a:r>
-            <a:endParaRPr lang="en-US" sz="1200" dirty="0"/>
-          </a:p>
-        </p:txBody>
-      </p:sp>
-      <p:sp>
-        <p:nvSpPr>
-          <p:cNvPr id="6" name="Text 4"/>
-          <p:cNvSpPr/>
-          <p:nvPr/>
-        </p:nvSpPr>
-        <p:spPr>
-          <a:xfrm>
-            <a:off x="406301" y="2089696"/>
-            <a:ext cx="8498026" cy="213271"/>
-          </a:xfrm>
-          <a:prstGeom prst="rect">
-            <a:avLst/>
-          </a:prstGeom>
-          <a:noFill/>
-          <a:ln/>
-        </p:spPr>
-        <p:txBody>
-          <a:bodyPr wrap="square" lIns="0" tIns="0" rIns="0" bIns="0" rtlCol="0" anchor="t"/>
-          <a:lstStyle/>
-          <a:p>
-            <a:pPr algn="l" indent="0" marL="0">
-              <a:lnSpc>
-                <a:spcPts val="1680"/>
-              </a:lnSpc>
-              <a:spcBef>
-                <a:spcPts val="300"/>
-              </a:spcBef>
-              <a:spcAft>
-                <a:spcPts val="300"/>
-              </a:spcAft>
-              <a:buNone/>
-            </a:pPr>
-            <a:r>
-              <a:rPr lang="en-US" sz="1200" dirty="0">
-                <a:solidFill>
-                  <a:srgbClr val="1C2833"/>
-                </a:solidFill>
-                <a:latin typeface="Arial" pitchFamily="34" charset="0"/>
-                <a:ea typeface="Arial" pitchFamily="34" charset="-122"/>
-                <a:cs typeface="Arial" pitchFamily="34" charset="-120"/>
-              </a:rPr>
-              <a:t>Teacher checks every pair's storyboard.</a:t>
-            </a:r>
-            <a:endParaRPr lang="en-US" sz="1200" dirty="0"/>
-          </a:p>
-        </p:txBody>
-      </p:sp>
-      <p:sp>
-        <p:nvSpPr>
-          <p:cNvPr id="7" name="Text 5"/>
-          <p:cNvSpPr/>
-          <p:nvPr/>
-        </p:nvSpPr>
-        <p:spPr>
-          <a:xfrm>
-            <a:off x="406301" y="2379166"/>
-            <a:ext cx="8498026" cy="426541"/>
-          </a:xfrm>
-          <a:prstGeom prst="rect">
-            <a:avLst/>
-          </a:prstGeom>
-          <a:noFill/>
-          <a:ln/>
-        </p:spPr>
-        <p:txBody>
-          <a:bodyPr wrap="square" lIns="0" tIns="0" rIns="0" bIns="0" rtlCol="0" anchor="t"/>
-          <a:lstStyle/>
-          <a:p>
-            <a:pPr algn="l" indent="0" marL="0">
-              <a:lnSpc>
-                <a:spcPts val="1680"/>
-              </a:lnSpc>
-              <a:spcBef>
-                <a:spcPts val="300"/>
-              </a:spcBef>
-              <a:spcAft>
-                <a:spcPts val="300"/>
-              </a:spcAft>
-              <a:buNone/>
-            </a:pPr>
-            <a:r>
-              <a:rPr lang="en-US" sz="1200" b="1" dirty="0">
-                <a:solidFill>
-                  <a:srgbClr val="1C2833"/>
-                </a:solidFill>
-                <a:latin typeface="Arial" pitchFamily="34" charset="0"/>
-                <a:ea typeface="Arial" pitchFamily="34" charset="-122"/>
-                <a:cs typeface="Arial" pitchFamily="34" charset="-120"/>
-              </a:rPr>
-              <a:t>Sprint 3 (15 min) — Try it.</a:t>
-            </a:r>
-            <a:pPr algn="l" indent="0" marL="0">
-              <a:lnSpc>
-                <a:spcPts val="1680"/>
-              </a:lnSpc>
-              <a:spcBef>
-                <a:spcPts val="300"/>
-              </a:spcBef>
-              <a:spcAft>
-                <a:spcPts val="300"/>
-              </a:spcAft>
-              <a:buNone/>
-            </a:pPr>
-            <a:r>
-              <a:rPr lang="en-US" sz="1200" dirty="0">
-                <a:solidFill>
-                  <a:srgbClr val="1C2833"/>
-                </a:solidFill>
-                <a:latin typeface="Arial" pitchFamily="34" charset="0"/>
-                <a:ea typeface="Arial" pitchFamily="34" charset="-122"/>
-                <a:cs typeface="Arial" pitchFamily="34" charset="-120"/>
-              </a:rPr>
-              <a:t> Each pair physically walks through their routine once at full speed. Teacher observes and gives one focused note.</a:t>
-            </a:r>
-            <a:endParaRPr lang="en-US" sz="1200" dirty="0"/>
-          </a:p>
-        </p:txBody>
-      </p:sp>
-      <p:sp>
-        <p:nvSpPr>
-          <p:cNvPr id="8" name="Text 6"/>
           <p:cNvSpPr/>
           <p:nvPr/>
         </p:nvSpPr>
@@ -3744,7 +4843,7 @@
                 <a:ea typeface="Georgia" pitchFamily="34" charset="-122"/>
                 <a:cs typeface="Georgia" pitchFamily="34" charset="-120"/>
               </a:rPr>
-              <a:t>Wrap-up (5 min)</a:t>
+              <a:t>Core (35 min) — Three sprints</a:t>
             </a:r>
             <a:endParaRPr lang="en-US" sz="1800" dirty="0"/>
           </a:p>
@@ -3759,7 +4858,7 @@
         <p:spPr>
           <a:xfrm>
             <a:off x="406301" y="870942"/>
-            <a:ext cx="8498026" cy="426541"/>
+            <a:ext cx="8498026" cy="213271"/>
           </a:xfrm>
           <a:prstGeom prst="rect">
             <a:avLst/>
@@ -3784,7 +4883,7 @@
               <a:buNone/>
             </a:pPr>
             <a:r>
-              <a:rPr lang="en-US" sz="1200" dirty="0">
+              <a:rPr lang="en-US" sz="1200" b="1" dirty="0">
                 <a:solidFill>
                   <a:srgbClr val="1C2833"/>
                 </a:solidFill>
@@ -3792,7 +4891,30 @@
                 <a:ea typeface="Arial" pitchFamily="34" charset="-122"/>
                 <a:cs typeface="Arial" pitchFamily="34" charset="-120"/>
               </a:rPr>
-              <a:t>– One pair (volunteer) shows their full routine to the class — 5 min if there's time, else preview. – Plan paragraph submitted at the door. – Preview Day 9: refine + rehearse with a buddy pair.</a:t>
+              <a:t>Sprint 1 (10 min) — Plan.</a:t>
+            </a:r>
+            <a:pPr algn="l" indent="0" marL="0">
+              <a:lnSpc>
+                <a:spcPts val="1680"/>
+              </a:lnSpc>
+              <a:spcBef>
+                <a:spcPts val="300"/>
+              </a:spcBef>
+              <a:spcAft>
+                <a:spcPts val="300"/>
+              </a:spcAft>
+              <a:buNone/>
+            </a:pPr>
+            <a:r>
+              <a:rPr lang="en-US" sz="1200" dirty="0">
+                <a:solidFill>
+                  <a:srgbClr val="1C2833"/>
+                </a:solidFill>
+                <a:latin typeface="Arial" pitchFamily="34" charset="0"/>
+                <a:ea typeface="Arial" pitchFamily="34" charset="-122"/>
+                <a:cs typeface="Arial" pitchFamily="34" charset="-120"/>
+              </a:rPr>
+              <a:t> Pairs finalise:</a:t>
             </a:r>
             <a:endParaRPr lang="en-US" sz="1200" dirty="0"/>
           </a:p>
@@ -3801,6 +4923,148 @@
       <p:sp>
         <p:nvSpPr>
           <p:cNvPr id="5" name="Text 3"/>
+          <p:cNvSpPr/>
+          <p:nvPr/>
+        </p:nvSpPr>
+        <p:spPr>
+          <a:xfrm>
+            <a:off x="634901" y="1173063"/>
+            <a:ext cx="8102798" cy="1257002"/>
+          </a:xfrm>
+          <a:prstGeom prst="rect">
+            <a:avLst/>
+          </a:prstGeom>
+          <a:noFill/>
+          <a:ln/>
+        </p:spPr>
+        <p:txBody>
+          <a:bodyPr wrap="square" lIns="0" tIns="0" rIns="0" bIns="0" rtlCol="0" anchor="t"/>
+          <a:lstStyle/>
+          <a:p>
+            <a:pPr algn="l" marL="342900" indent="-342900">
+              <a:lnSpc>
+                <a:spcPts val="1620"/>
+              </a:lnSpc>
+              <a:spcAft>
+                <a:spcPts val="300"/>
+              </a:spcAft>
+              <a:buSzPct val="100000"/>
+              <a:buChar char="•"/>
+            </a:pPr>
+            <a:r>
+              <a:rPr lang="en-US" sz="1200" dirty="0">
+                <a:solidFill>
+                  <a:srgbClr val="1C2833"/>
+                </a:solidFill>
+                <a:latin typeface="Arial" pitchFamily="34" charset="0"/>
+                <a:ea typeface="Arial" pitchFamily="34" charset="-122"/>
+                <a:cs typeface="Arial" pitchFamily="34" charset="-120"/>
+              </a:rPr>
+              <a:t>Target audience (peers / parents / younger siblings / pre-exam classmates)</a:t>
+            </a:r>
+            <a:endParaRPr lang="en-US" sz="1200" dirty="0"/>
+          </a:p>
+          <a:p>
+            <a:pPr algn="l" marL="342900" indent="-342900">
+              <a:lnSpc>
+                <a:spcPts val="1620"/>
+              </a:lnSpc>
+              <a:spcAft>
+                <a:spcPts val="300"/>
+              </a:spcAft>
+              <a:buSzPct val="100000"/>
+              <a:buChar char="•"/>
+            </a:pPr>
+            <a:r>
+              <a:rPr lang="en-US" sz="1200" dirty="0">
+                <a:solidFill>
+                  <a:srgbClr val="1C2833"/>
+                </a:solidFill>
+                <a:latin typeface="Arial" pitchFamily="34" charset="0"/>
+                <a:ea typeface="Arial" pitchFamily="34" charset="-122"/>
+                <a:cs typeface="Arial" pitchFamily="34" charset="-120"/>
+              </a:rPr>
+              <a:t>5-minute sequence outline (which āsanas, in what order, with timing)</a:t>
+            </a:r>
+            <a:endParaRPr lang="en-US" sz="1200" dirty="0"/>
+          </a:p>
+          <a:p>
+            <a:pPr algn="l" marL="342900" indent="-342900">
+              <a:lnSpc>
+                <a:spcPts val="1620"/>
+              </a:lnSpc>
+              <a:spcAft>
+                <a:spcPts val="300"/>
+              </a:spcAft>
+              <a:buSzPct val="100000"/>
+              <a:buChar char="•"/>
+            </a:pPr>
+            <a:r>
+              <a:rPr lang="en-US" sz="1200" dirty="0">
+                <a:solidFill>
+                  <a:srgbClr val="1C2833"/>
+                </a:solidFill>
+                <a:latin typeface="Arial" pitchFamily="34" charset="0"/>
+                <a:ea typeface="Arial" pitchFamily="34" charset="-122"/>
+                <a:cs typeface="Arial" pitchFamily="34" charset="-120"/>
+              </a:rPr>
+              <a:t>A breath element (counted breath or natural-breath segment)</a:t>
+            </a:r>
+            <a:endParaRPr lang="en-US" sz="1200" dirty="0"/>
+          </a:p>
+          <a:p>
+            <a:pPr algn="l" marL="342900" indent="-342900">
+              <a:lnSpc>
+                <a:spcPts val="1620"/>
+              </a:lnSpc>
+              <a:spcAft>
+                <a:spcPts val="300"/>
+              </a:spcAft>
+              <a:buSzPct val="100000"/>
+              <a:buChar char="•"/>
+            </a:pPr>
+            <a:r>
+              <a:rPr lang="en-US" sz="1200" dirty="0">
+                <a:solidFill>
+                  <a:srgbClr val="1C2833"/>
+                </a:solidFill>
+                <a:latin typeface="Arial" pitchFamily="34" charset="0"/>
+                <a:ea typeface="Arial" pitchFamily="34" charset="-122"/>
+                <a:cs typeface="Arial" pitchFamily="34" charset="-120"/>
+              </a:rPr>
+              <a:t>The source they'll cite (verse, sūtra, or PDF reference)</a:t>
+            </a:r>
+            <a:endParaRPr lang="en-US" sz="1200" dirty="0"/>
+          </a:p>
+          <a:p>
+            <a:pPr algn="l" marL="342900" indent="-342900">
+              <a:lnSpc>
+                <a:spcPts val="1620"/>
+              </a:lnSpc>
+              <a:spcAft>
+                <a:spcPts val="300"/>
+              </a:spcAft>
+              <a:buSzPct val="100000"/>
+              <a:buChar char="•"/>
+            </a:pPr>
+            <a:r>
+              <a:rPr lang="en-US" sz="1200" dirty="0">
+                <a:solidFill>
+                  <a:srgbClr val="1C2833"/>
+                </a:solidFill>
+                <a:latin typeface="Arial" pitchFamily="34" charset="0"/>
+                <a:ea typeface="Arial" pitchFamily="34" charset="-122"/>
+                <a:cs typeface="Arial" pitchFamily="34" charset="-120"/>
+              </a:rPr>
+              <a:t>Division of labour for the Day 10 demonstration</a:t>
+            </a:r>
+            <a:endParaRPr lang="en-US" sz="1200" dirty="0"/>
+          </a:p>
+        </p:txBody>
+      </p:sp>
+      <p:sp>
+        <p:nvSpPr>
+          <p:cNvPr id="6" name="Text 4"/>
           <p:cNvSpPr/>
           <p:nvPr/>
         </p:nvSpPr>
@@ -3950,7 +5214,7 @@
                 <a:ea typeface="Georgia" pitchFamily="34" charset="-122"/>
                 <a:cs typeface="Georgia" pitchFamily="34" charset="-120"/>
               </a:rPr>
-              <a:t>Student-facing content</a:t>
+              <a:t>Core (35 min) — Three sprints (cont.)</a:t>
             </a:r>
             <a:endParaRPr lang="en-US" sz="1800" dirty="0"/>
           </a:p>
@@ -3964,50 +5228,186 @@
         </p:nvSpPr>
         <p:spPr>
           <a:xfrm>
-            <a:off x="406301" y="883593"/>
-            <a:ext cx="8331398" cy="3438525"/>
-          </a:xfrm>
-          <a:prstGeom prst="rect">
-            <a:avLst/>
-          </a:prstGeom>
-          <a:solidFill>
-            <a:srgbClr val="F4F8F9"/>
-          </a:solidFill>
-          <a:ln/>
-        </p:spPr>
-        <p:txBody>
-          <a:bodyPr wrap="square" rtlCol="0" anchor="ctr"/>
-          <a:lstStyle/>
-          <a:p>
-            <a:pPr indent="0" marL="0">
-              <a:buNone/>
-            </a:pPr>
-            <a:endParaRPr lang="en-US" dirty="0"/>
-          </a:p>
-        </p:txBody>
-      </p:sp>
-      <p:sp>
-        <p:nvSpPr>
-          <p:cNvPr id="5" name="Shape 3"/>
-          <p:cNvSpPr/>
-          <p:nvPr/>
-        </p:nvSpPr>
-        <p:spPr>
-          <a:xfrm>
-            <a:off x="434876" y="883593"/>
-            <a:ext cx="0" cy="3438525"/>
-          </a:xfrm>
-          <a:prstGeom prst="line">
+            <a:off x="406301" y="870942"/>
+            <a:ext cx="8498026" cy="213271"/>
+          </a:xfrm>
+          <a:prstGeom prst="rect">
             <a:avLst/>
           </a:prstGeom>
           <a:noFill/>
-          <a:ln w="57150">
-            <a:solidFill>
-              <a:srgbClr val="FE4447"/>
-            </a:solidFill>
-            <a:prstDash val="solid"/>
-          </a:ln>
-        </p:spPr>
+          <a:ln/>
+        </p:spPr>
+        <p:txBody>
+          <a:bodyPr wrap="square" lIns="0" tIns="0" rIns="0" bIns="0" rtlCol="0" anchor="t"/>
+          <a:lstStyle/>
+          <a:p>
+            <a:pPr algn="l" indent="0" marL="0">
+              <a:lnSpc>
+                <a:spcPts val="1680"/>
+              </a:lnSpc>
+              <a:spcBef>
+                <a:spcPts val="300"/>
+              </a:spcBef>
+              <a:spcAft>
+                <a:spcPts val="300"/>
+              </a:spcAft>
+              <a:buNone/>
+            </a:pPr>
+            <a:r>
+              <a:rPr lang="en-US" sz="1200" b="1" dirty="0">
+                <a:solidFill>
+                  <a:srgbClr val="1C2833"/>
+                </a:solidFill>
+                <a:latin typeface="Arial" pitchFamily="34" charset="0"/>
+                <a:ea typeface="Arial" pitchFamily="34" charset="-122"/>
+                <a:cs typeface="Arial" pitchFamily="34" charset="-120"/>
+              </a:rPr>
+              <a:t>Sprint 2 (10 min) — Storyboard the sequence.</a:t>
+            </a:r>
+            <a:pPr algn="l" indent="0" marL="0">
+              <a:lnSpc>
+                <a:spcPts val="1680"/>
+              </a:lnSpc>
+              <a:spcBef>
+                <a:spcPts val="300"/>
+              </a:spcBef>
+              <a:spcAft>
+                <a:spcPts val="300"/>
+              </a:spcAft>
+              <a:buNone/>
+            </a:pPr>
+            <a:r>
+              <a:rPr lang="en-US" sz="1200" dirty="0">
+                <a:solidFill>
+                  <a:srgbClr val="1C2833"/>
+                </a:solidFill>
+                <a:latin typeface="Arial" pitchFamily="34" charset="0"/>
+                <a:ea typeface="Arial" pitchFamily="34" charset="-122"/>
+                <a:cs typeface="Arial" pitchFamily="34" charset="-120"/>
+              </a:rPr>
+              <a:t> On paper:</a:t>
+            </a:r>
+            <a:endParaRPr lang="en-US" sz="1200" dirty="0"/>
+          </a:p>
+        </p:txBody>
+      </p:sp>
+      <p:sp>
+        <p:nvSpPr>
+          <p:cNvPr id="5" name="Text 3"/>
+          <p:cNvSpPr/>
+          <p:nvPr/>
+        </p:nvSpPr>
+        <p:spPr>
+          <a:xfrm>
+            <a:off x="634901" y="1173063"/>
+            <a:ext cx="8102798" cy="1013222"/>
+          </a:xfrm>
+          <a:prstGeom prst="rect">
+            <a:avLst/>
+          </a:prstGeom>
+          <a:noFill/>
+          <a:ln/>
+        </p:spPr>
+        <p:txBody>
+          <a:bodyPr wrap="square" lIns="0" tIns="0" rIns="0" bIns="0" rtlCol="0" anchor="t"/>
+          <a:lstStyle/>
+          <a:p>
+            <a:pPr algn="l" marL="342900" indent="-342900">
+              <a:lnSpc>
+                <a:spcPts val="1620"/>
+              </a:lnSpc>
+              <a:spcAft>
+                <a:spcPts val="300"/>
+              </a:spcAft>
+              <a:buSzPct val="100000"/>
+              <a:buChar char="•"/>
+            </a:pPr>
+            <a:r>
+              <a:rPr lang="en-US" sz="1200" dirty="0">
+                <a:solidFill>
+                  <a:srgbClr val="1C2833"/>
+                </a:solidFill>
+                <a:latin typeface="Arial" pitchFamily="34" charset="0"/>
+                <a:ea typeface="Arial" pitchFamily="34" charset="-122"/>
+                <a:cs typeface="Arial" pitchFamily="34" charset="-120"/>
+              </a:rPr>
+              <a:t>Draw each pose (stick figures fine)</a:t>
+            </a:r>
+            <a:endParaRPr lang="en-US" sz="1200" dirty="0"/>
+          </a:p>
+          <a:p>
+            <a:pPr algn="l" marL="342900" indent="-342900">
+              <a:lnSpc>
+                <a:spcPts val="1620"/>
+              </a:lnSpc>
+              <a:spcAft>
+                <a:spcPts val="300"/>
+              </a:spcAft>
+              <a:buSzPct val="100000"/>
+              <a:buChar char="•"/>
+            </a:pPr>
+            <a:r>
+              <a:rPr lang="en-US" sz="1200" dirty="0">
+                <a:solidFill>
+                  <a:srgbClr val="1C2833"/>
+                </a:solidFill>
+                <a:latin typeface="Arial" pitchFamily="34" charset="0"/>
+                <a:ea typeface="Arial" pitchFamily="34" charset="-122"/>
+                <a:cs typeface="Arial" pitchFamily="34" charset="-120"/>
+              </a:rPr>
+              <a:t>Write the breath cue under each</a:t>
+            </a:r>
+            <a:endParaRPr lang="en-US" sz="1200" dirty="0"/>
+          </a:p>
+          <a:p>
+            <a:pPr algn="l" marL="342900" indent="-342900">
+              <a:lnSpc>
+                <a:spcPts val="1620"/>
+              </a:lnSpc>
+              <a:spcAft>
+                <a:spcPts val="300"/>
+              </a:spcAft>
+              <a:buSzPct val="100000"/>
+              <a:buChar char="•"/>
+            </a:pPr>
+            <a:r>
+              <a:rPr lang="en-US" sz="1200" dirty="0">
+                <a:solidFill>
+                  <a:srgbClr val="1C2833"/>
+                </a:solidFill>
+                <a:latin typeface="Arial" pitchFamily="34" charset="0"/>
+                <a:ea typeface="Arial" pitchFamily="34" charset="-122"/>
+                <a:cs typeface="Arial" pitchFamily="34" charset="-120"/>
+              </a:rPr>
+              <a:t>Add time per pose</a:t>
+            </a:r>
+            <a:endParaRPr lang="en-US" sz="1200" dirty="0"/>
+          </a:p>
+          <a:p>
+            <a:pPr algn="l" marL="342900" indent="-342900">
+              <a:lnSpc>
+                <a:spcPts val="1620"/>
+              </a:lnSpc>
+              <a:spcAft>
+                <a:spcPts val="300"/>
+              </a:spcAft>
+              <a:buSzPct val="100000"/>
+              <a:buChar char="•"/>
+            </a:pPr>
+            <a:r>
+              <a:rPr lang="en-US" sz="1200" dirty="0">
+                <a:solidFill>
+                  <a:srgbClr val="1C2833"/>
+                </a:solidFill>
+                <a:latin typeface="Arial" pitchFamily="34" charset="0"/>
+                <a:ea typeface="Arial" pitchFamily="34" charset="-122"/>
+                <a:cs typeface="Arial" pitchFamily="34" charset="-120"/>
+              </a:rPr>
+              <a:t>Total should be 5 minutes ± 30 seconds</a:t>
+            </a:r>
+            <a:endParaRPr lang="en-US" sz="1200" dirty="0"/>
+          </a:p>
+        </p:txBody>
       </p:sp>
       <p:sp>
         <p:nvSpPr>
@@ -4017,8 +5417,8 @@
         </p:nvSpPr>
         <p:spPr>
           <a:xfrm>
-            <a:off x="692051" y="1074093"/>
-            <a:ext cx="7973389" cy="230981"/>
+            <a:off x="406301" y="2275136"/>
+            <a:ext cx="8498026" cy="213271"/>
           </a:xfrm>
           <a:prstGeom prst="rect">
             <a:avLst/>
@@ -4032,7 +5432,7 @@
           <a:p>
             <a:pPr algn="l" indent="0" marL="0">
               <a:lnSpc>
-                <a:spcPts val="1820"/>
+                <a:spcPts val="1680"/>
               </a:lnSpc>
               <a:spcBef>
                 <a:spcPts val="300"/>
@@ -4043,17 +5443,17 @@
               <a:buNone/>
             </a:pPr>
             <a:r>
-              <a:rPr lang="en-US" sz="1300" b="1" i="1" dirty="0">
-                <a:solidFill>
-                  <a:srgbClr val="1C2833"/>
-                </a:solidFill>
-                <a:latin typeface="Georgia" pitchFamily="34" charset="0"/>
-                <a:ea typeface="Georgia" pitchFamily="34" charset="-122"/>
-                <a:cs typeface="Georgia" pitchFamily="34" charset="-120"/>
-              </a:rPr>
-              <a:t>Project workshop — Session 1</a:t>
-            </a:r>
-            <a:endParaRPr lang="en-US" sz="1300" dirty="0"/>
+              <a:rPr lang="en-US" sz="1200" dirty="0">
+                <a:solidFill>
+                  <a:srgbClr val="1C2833"/>
+                </a:solidFill>
+                <a:latin typeface="Arial" pitchFamily="34" charset="0"/>
+                <a:ea typeface="Arial" pitchFamily="34" charset="-122"/>
+                <a:cs typeface="Arial" pitchFamily="34" charset="-120"/>
+              </a:rPr>
+              <a:t>Teacher checks every pair's storyboard.</a:t>
+            </a:r>
+            <a:endParaRPr lang="en-US" sz="1200" dirty="0"/>
           </a:p>
         </p:txBody>
       </p:sp>
@@ -4065,245 +5465,7 @@
         </p:nvSpPr>
         <p:spPr>
           <a:xfrm>
-            <a:off x="692051" y="1343174"/>
-            <a:ext cx="7973389" cy="230981"/>
-          </a:xfrm>
-          <a:prstGeom prst="rect">
-            <a:avLst/>
-          </a:prstGeom>
-          <a:noFill/>
-          <a:ln/>
-        </p:spPr>
-        <p:txBody>
-          <a:bodyPr wrap="square" lIns="0" tIns="0" rIns="0" bIns="0" rtlCol="0" anchor="t"/>
-          <a:lstStyle/>
-          <a:p>
-            <a:pPr algn="l" indent="0" marL="0">
-              <a:lnSpc>
-                <a:spcPts val="1820"/>
-              </a:lnSpc>
-              <a:spcBef>
-                <a:spcPts val="300"/>
-              </a:spcBef>
-              <a:spcAft>
-                <a:spcPts val="300"/>
-              </a:spcAft>
-              <a:buNone/>
-            </a:pPr>
-            <a:r>
-              <a:rPr lang="en-US" sz="1300" i="1" dirty="0">
-                <a:solidFill>
-                  <a:srgbClr val="1C2833"/>
-                </a:solidFill>
-                <a:latin typeface="Georgia" pitchFamily="34" charset="0"/>
-                <a:ea typeface="Georgia" pitchFamily="34" charset="-122"/>
-                <a:cs typeface="Georgia" pitchFamily="34" charset="-120"/>
-              </a:rPr>
-              <a:t>By end of class, your pair should have:</a:t>
-            </a:r>
-            <a:endParaRPr lang="en-US" sz="1300" dirty="0"/>
-          </a:p>
-        </p:txBody>
-      </p:sp>
-      <p:sp>
-        <p:nvSpPr>
-          <p:cNvPr id="8" name="Text 6"/>
-          <p:cNvSpPr/>
-          <p:nvPr/>
-        </p:nvSpPr>
-        <p:spPr>
-          <a:xfrm>
-            <a:off x="692051" y="1612255"/>
-            <a:ext cx="7973389" cy="461963"/>
-          </a:xfrm>
-          <a:prstGeom prst="rect">
-            <a:avLst/>
-          </a:prstGeom>
-          <a:noFill/>
-          <a:ln/>
-        </p:spPr>
-        <p:txBody>
-          <a:bodyPr wrap="square" lIns="0" tIns="0" rIns="0" bIns="0" rtlCol="0" anchor="t"/>
-          <a:lstStyle/>
-          <a:p>
-            <a:pPr algn="l" indent="0" marL="0">
-              <a:lnSpc>
-                <a:spcPts val="1820"/>
-              </a:lnSpc>
-              <a:spcBef>
-                <a:spcPts val="300"/>
-              </a:spcBef>
-              <a:spcAft>
-                <a:spcPts val="300"/>
-              </a:spcAft>
-              <a:buNone/>
-            </a:pPr>
-            <a:r>
-              <a:rPr lang="en-US" sz="1300" i="1" dirty="0">
-                <a:solidFill>
-                  <a:srgbClr val="1C2833"/>
-                </a:solidFill>
-                <a:latin typeface="Georgia" pitchFamily="34" charset="0"/>
-                <a:ea typeface="Georgia" pitchFamily="34" charset="-122"/>
-                <a:cs typeface="Georgia" pitchFamily="34" charset="-120"/>
-              </a:rPr>
-              <a:t>1. A written outline of your 5-minute routine. 2. A storyboard drawing. 3. ONE physical run-through completed.</a:t>
-            </a:r>
-            <a:endParaRPr lang="en-US" sz="1300" dirty="0"/>
-          </a:p>
-        </p:txBody>
-      </p:sp>
-      <p:sp>
-        <p:nvSpPr>
-          <p:cNvPr id="9" name="Text 7"/>
-          <p:cNvSpPr/>
-          <p:nvPr/>
-        </p:nvSpPr>
-        <p:spPr>
-          <a:xfrm>
-            <a:off x="692051" y="2112318"/>
-            <a:ext cx="7973389" cy="230981"/>
-          </a:xfrm>
-          <a:prstGeom prst="rect">
-            <a:avLst/>
-          </a:prstGeom>
-          <a:noFill/>
-          <a:ln/>
-        </p:spPr>
-        <p:txBody>
-          <a:bodyPr wrap="square" lIns="0" tIns="0" rIns="0" bIns="0" rtlCol="0" anchor="t"/>
-          <a:lstStyle/>
-          <a:p>
-            <a:pPr algn="l" indent="0" marL="0">
-              <a:lnSpc>
-                <a:spcPts val="1820"/>
-              </a:lnSpc>
-              <a:spcBef>
-                <a:spcPts val="300"/>
-              </a:spcBef>
-              <a:spcAft>
-                <a:spcPts val="300"/>
-              </a:spcAft>
-              <a:buNone/>
-            </a:pPr>
-            <a:r>
-              <a:rPr lang="en-US" sz="1300" b="1" i="1" dirty="0">
-                <a:solidFill>
-                  <a:srgbClr val="1C2833"/>
-                </a:solidFill>
-                <a:latin typeface="Georgia" pitchFamily="34" charset="0"/>
-                <a:ea typeface="Georgia" pitchFamily="34" charset="-122"/>
-                <a:cs typeface="Georgia" pitchFamily="34" charset="-120"/>
-              </a:rPr>
-              <a:t>Outline template:</a:t>
-            </a:r>
-            <a:endParaRPr lang="en-US" sz="1300" dirty="0"/>
-          </a:p>
-        </p:txBody>
-      </p:sp>
-      <p:sp>
-        <p:nvSpPr>
-          <p:cNvPr id="10" name="Text 8"/>
-          <p:cNvSpPr/>
-          <p:nvPr/>
-        </p:nvSpPr>
-        <p:spPr>
-          <a:xfrm>
-            <a:off x="692051" y="2381399"/>
-            <a:ext cx="7973389" cy="1750219"/>
-          </a:xfrm>
-          <a:prstGeom prst="rect">
-            <a:avLst/>
-          </a:prstGeom>
-          <a:noFill/>
-          <a:ln/>
-        </p:spPr>
-        <p:txBody>
-          <a:bodyPr wrap="square" lIns="0" tIns="0" rIns="0" bIns="0" rtlCol="0" anchor="t"/>
-          <a:lstStyle/>
-          <a:p>
-            <a:pPr algn="l" indent="0" marL="0">
-              <a:lnSpc>
-                <a:spcPts val="1820"/>
-              </a:lnSpc>
-              <a:spcBef>
-                <a:spcPts val="300"/>
-              </a:spcBef>
-              <a:spcAft>
-                <a:spcPts val="300"/>
-              </a:spcAft>
-              <a:buNone/>
-            </a:pPr>
-            <a:r>
-              <a:rPr lang="en-US" sz="1300" dirty="0">
-                <a:solidFill>
-                  <a:srgbClr val="1C2833"/>
-                </a:solidFill>
-                <a:latin typeface="Georgia" pitchFamily="34" charset="0"/>
-                <a:ea typeface="Georgia" pitchFamily="34" charset="-122"/>
-                <a:cs typeface="Georgia" pitchFamily="34" charset="-120"/>
-              </a:rPr>
-              <a:t>``</a:t>
-            </a:r>
-            <a:pPr algn="l" indent="0" marL="0">
-              <a:lnSpc>
-                <a:spcPts val="1820"/>
-              </a:lnSpc>
-              <a:spcBef>
-                <a:spcPts val="300"/>
-              </a:spcBef>
-              <a:spcAft>
-                <a:spcPts val="300"/>
-              </a:spcAft>
-              <a:buNone/>
-            </a:pPr>
-            <a:r>
-              <a:rPr lang="en-US" sz="1300" i="1" dirty="0">
-                <a:solidFill>
-                  <a:srgbClr val="1C2833"/>
-                </a:solidFill>
-                <a:latin typeface="Georgia" pitchFamily="34" charset="0"/>
-                <a:ea typeface="Georgia" pitchFamily="34" charset="-122"/>
-                <a:cs typeface="Georgia" pitchFamily="34" charset="-120"/>
-              </a:rPr>
-              <a:t> Audience: __________ Goal of routine (calming / energising / focusing / restorative): __________ Sequence: 0:00–0:30 __________ (breath: __________) 0:30–1:00 __________ (breath: __________) 1:00–2:00 __________ (breath: __________) 2:00–3:30 __________ (breath: __________) 3:30–4:30 __________ (breath: __________) 4:30–5:00 __________ (breath: __________) Source citation: __________ Division of labour (Partner A leads sequences ____): __________ Division of labour (Partner B leads sequences ____): __________</a:t>
-            </a:r>
-            <a:pPr algn="l" indent="0" marL="0">
-              <a:lnSpc>
-                <a:spcPts val="1820"/>
-              </a:lnSpc>
-              <a:spcBef>
-                <a:spcPts val="300"/>
-              </a:spcBef>
-              <a:spcAft>
-                <a:spcPts val="300"/>
-              </a:spcAft>
-              <a:buNone/>
-            </a:pPr>
-            <a:r>
-              <a:rPr lang="en-US" sz="1300" dirty="0">
-                <a:solidFill>
-                  <a:srgbClr val="1C2833"/>
-                </a:solidFill>
-                <a:latin typeface="Georgia" pitchFamily="34" charset="0"/>
-                <a:ea typeface="Georgia" pitchFamily="34" charset="-122"/>
-                <a:cs typeface="Georgia" pitchFamily="34" charset="-120"/>
-              </a:rPr>
-              <a:t>``</a:t>
-            </a:r>
-            <a:endParaRPr lang="en-US" sz="1300" dirty="0"/>
-          </a:p>
-        </p:txBody>
-      </p:sp>
-      <p:sp>
-        <p:nvSpPr>
-          <p:cNvPr id="11" name="Text 9"/>
-          <p:cNvSpPr/>
-          <p:nvPr/>
-        </p:nvSpPr>
-        <p:spPr>
-          <a:xfrm>
-            <a:off x="406301" y="4487168"/>
+            <a:off x="406301" y="4434929"/>
             <a:ext cx="8498026" cy="213271"/>
           </a:xfrm>
           <a:prstGeom prst="rect">
@@ -4447,7 +5609,7 @@
                 <a:ea typeface="Georgia" pitchFamily="34" charset="-122"/>
                 <a:cs typeface="Georgia" pitchFamily="34" charset="-120"/>
               </a:rPr>
-              <a:t>Homework</a:t>
+              <a:t>Core (35 min) — Three sprints (cont.)</a:t>
             </a:r>
             <a:endParaRPr lang="en-US" sz="1800" dirty="0"/>
           </a:p>
@@ -4462,7 +5624,7 @@
         <p:spPr>
           <a:xfrm>
             <a:off x="406301" y="870942"/>
-            <a:ext cx="8498026" cy="213271"/>
+            <a:ext cx="8498026" cy="426541"/>
           </a:xfrm>
           <a:prstGeom prst="rect">
             <a:avLst/>
@@ -4487,7 +5649,7 @@
               <a:buNone/>
             </a:pPr>
             <a:r>
-              <a:rPr lang="en-US" sz="1200" dirty="0">
+              <a:rPr lang="en-US" sz="1200" b="1" dirty="0">
                 <a:solidFill>
                   <a:srgbClr val="1C2833"/>
                 </a:solidFill>
@@ -4495,7 +5657,30 @@
                 <a:ea typeface="Arial" pitchFamily="34" charset="-122"/>
                 <a:cs typeface="Arial" pitchFamily="34" charset="-120"/>
               </a:rPr>
-              <a:t>– Whatever didn't get done in class: finish at home. Practise the routine 1 more time.</a:t>
+              <a:t>Sprint 3 (15 min) — Try it.</a:t>
+            </a:r>
+            <a:pPr algn="l" indent="0" marL="0">
+              <a:lnSpc>
+                <a:spcPts val="1680"/>
+              </a:lnSpc>
+              <a:spcBef>
+                <a:spcPts val="300"/>
+              </a:spcBef>
+              <a:spcAft>
+                <a:spcPts val="300"/>
+              </a:spcAft>
+              <a:buNone/>
+            </a:pPr>
+            <a:r>
+              <a:rPr lang="en-US" sz="1200" dirty="0">
+                <a:solidFill>
+                  <a:srgbClr val="1C2833"/>
+                </a:solidFill>
+                <a:latin typeface="Arial" pitchFamily="34" charset="0"/>
+                <a:ea typeface="Arial" pitchFamily="34" charset="-122"/>
+                <a:cs typeface="Arial" pitchFamily="34" charset="-120"/>
+              </a:rPr>
+              <a:t> Each pair physically walks through their routine once at full speed. Teacher observes and gives one focused note.</a:t>
             </a:r>
             <a:endParaRPr lang="en-US" sz="1200" dirty="0"/>
           </a:p>
@@ -4653,7 +5838,7 @@
                 <a:ea typeface="Georgia" pitchFamily="34" charset="-122"/>
                 <a:cs typeface="Georgia" pitchFamily="34" charset="-120"/>
               </a:rPr>
-              <a:t>Differentiation</a:t>
+              <a:t>Wrap-up (5 min)</a:t>
             </a:r>
             <a:endParaRPr lang="en-US" sz="1800" dirty="0"/>
           </a:p>
@@ -4668,7 +5853,7 @@
         <p:spPr>
           <a:xfrm>
             <a:off x="634901" y="883593"/>
-            <a:ext cx="8102798" cy="731341"/>
+            <a:ext cx="8102798" cy="769441"/>
           </a:xfrm>
           <a:prstGeom prst="rect">
             <a:avLst/>
@@ -4691,7 +5876,7 @@
               <a:buChar char="•"/>
             </a:pPr>
             <a:r>
-              <a:rPr lang="en-US" sz="1200" b="1" dirty="0">
+              <a:rPr lang="en-US" sz="1200" dirty="0">
                 <a:solidFill>
                   <a:srgbClr val="1C2833"/>
                 </a:solidFill>
@@ -4699,16 +5884,20 @@
                 <a:ea typeface="Arial" pitchFamily="34" charset="-122"/>
                 <a:cs typeface="Arial" pitchFamily="34" charset="-120"/>
               </a:rPr>
-              <a:t>Tier up:</a:t>
-            </a:r>
-            <a:pPr algn="l" indent="0" marL="0">
+              <a:t>One pair (volunteer) shows their full routine to the class — 5 min if there's time, else preview.</a:t>
+            </a:r>
+            <a:endParaRPr lang="en-US" sz="1200" dirty="0"/>
+          </a:p>
+          <a:p>
+            <a:pPr algn="l" marL="342900" indent="-342900">
               <a:lnSpc>
                 <a:spcPts val="1620"/>
               </a:lnSpc>
               <a:spcAft>
                 <a:spcPts val="300"/>
               </a:spcAft>
-              <a:buNone/>
+              <a:buSzPct val="100000"/>
+              <a:buChar char="•"/>
             </a:pPr>
             <a:r>
               <a:rPr lang="en-US" sz="1200" dirty="0">
@@ -4719,7 +5908,7 @@
                 <a:ea typeface="Arial" pitchFamily="34" charset="-122"/>
                 <a:cs typeface="Arial" pitchFamily="34" charset="-120"/>
               </a:rPr>
-              <a:t> Add a 30-second "intention setting" at the start and "savasana" at the end. Make the 5 min feel complete.</a:t>
+              <a:t>Plan paragraph submitted at the door.</a:t>
             </a:r>
             <a:endParaRPr lang="en-US" sz="1200" dirty="0"/>
           </a:p>
@@ -4735,7 +5924,7 @@
               <a:buChar char="•"/>
             </a:pPr>
             <a:r>
-              <a:rPr lang="en-US" sz="1200" b="1" dirty="0">
+              <a:rPr lang="en-US" sz="1200" dirty="0">
                 <a:solidFill>
                   <a:srgbClr val="1C2833"/>
                 </a:solidFill>
@@ -4743,27 +5932,7 @@
                 <a:ea typeface="Arial" pitchFamily="34" charset="-122"/>
                 <a:cs typeface="Arial" pitchFamily="34" charset="-120"/>
               </a:rPr>
-              <a:t>Tier down:</a:t>
-            </a:r>
-            <a:pPr algn="l" indent="0" marL="0">
-              <a:lnSpc>
-                <a:spcPts val="1620"/>
-              </a:lnSpc>
-              <a:spcAft>
-                <a:spcPts val="300"/>
-              </a:spcAft>
-              <a:buNone/>
-            </a:pPr>
-            <a:r>
-              <a:rPr lang="en-US" sz="1200" dirty="0">
-                <a:solidFill>
-                  <a:srgbClr val="1C2833"/>
-                </a:solidFill>
-                <a:latin typeface="Arial" pitchFamily="34" charset="0"/>
-                <a:ea typeface="Arial" pitchFamily="34" charset="-122"/>
-                <a:cs typeface="Arial" pitchFamily="34" charset="-120"/>
-              </a:rPr>
-              <a:t> Reuse Day 7's stress-recovery sequence as your base; customise to your audience by adding 1–2 changes only.</a:t>
+              <a:t>Preview Day 9: refine + rehearse with a buddy pair.</a:t>
             </a:r>
             <a:endParaRPr lang="en-US" sz="1200" dirty="0"/>
           </a:p>
